--- a/lessons/lesson-15/slides.pptx
+++ b/lessons/lesson-15/slides.pptx
@@ -2,28 +2,28 @@
 <file path=ppt/presentation.xml><?xml version="1.0" encoding="utf-8"?>
 <p:presentation xmlns:p="http://schemas.openxmlformats.org/presentationml/2006/main">
   <p:sldMasterIdLst>
-    <p:sldMasterId xmlns:r="http://schemas.openxmlformats.org/officeDocument/2006/relationships" id="2147483648" r:id="R11f86922f5bc469f"/>
+    <p:sldMasterId xmlns:r="http://schemas.openxmlformats.org/officeDocument/2006/relationships" id="2147483648" r:id="R87fcc4f435a543e2"/>
   </p:sldMasterIdLst>
   <p:notesMasterIdLst>
-    <p:notesMasterId xmlns:r="http://schemas.openxmlformats.org/officeDocument/2006/relationships" r:id="R0ef91bbc54e9499d"/>
+    <p:notesMasterId xmlns:r="http://schemas.openxmlformats.org/officeDocument/2006/relationships" r:id="Rb71e2af0ab194d73"/>
   </p:notesMasterIdLst>
   <p:sldIdLst>
-    <p:sldId xmlns:r="http://schemas.openxmlformats.org/officeDocument/2006/relationships" id="256" r:id="R061e8c3ad58546a4"/>
-    <p:sldId xmlns:r="http://schemas.openxmlformats.org/officeDocument/2006/relationships" id="257" r:id="Rcd6ab80b19224437"/>
-    <p:sldId xmlns:r="http://schemas.openxmlformats.org/officeDocument/2006/relationships" id="258" r:id="R68b43c3ff099492c"/>
-    <p:sldId xmlns:r="http://schemas.openxmlformats.org/officeDocument/2006/relationships" id="259" r:id="R3491e071e2304a60"/>
-    <p:sldId xmlns:r="http://schemas.openxmlformats.org/officeDocument/2006/relationships" id="260" r:id="R51fc569b1c834038"/>
-    <p:sldId xmlns:r="http://schemas.openxmlformats.org/officeDocument/2006/relationships" id="261" r:id="Rde835ef9d13f4b78"/>
-    <p:sldId xmlns:r="http://schemas.openxmlformats.org/officeDocument/2006/relationships" id="262" r:id="Ra4727dc50edc4cbe"/>
-    <p:sldId xmlns:r="http://schemas.openxmlformats.org/officeDocument/2006/relationships" id="263" r:id="R2e611c93ce7b4d4c"/>
-    <p:sldId xmlns:r="http://schemas.openxmlformats.org/officeDocument/2006/relationships" id="264" r:id="R27ce0200027e47c8"/>
-    <p:sldId xmlns:r="http://schemas.openxmlformats.org/officeDocument/2006/relationships" id="265" r:id="R6459100bd376409d"/>
-    <p:sldId xmlns:r="http://schemas.openxmlformats.org/officeDocument/2006/relationships" id="266" r:id="Rb9e6a5b48f3a43c5"/>
-    <p:sldId xmlns:r="http://schemas.openxmlformats.org/officeDocument/2006/relationships" id="267" r:id="R92e9f1760f354087"/>
-    <p:sldId xmlns:r="http://schemas.openxmlformats.org/officeDocument/2006/relationships" id="268" r:id="R1e94a698a60b45d4"/>
-    <p:sldId xmlns:r="http://schemas.openxmlformats.org/officeDocument/2006/relationships" id="269" r:id="R92b6c7c8a142424b"/>
-    <p:sldId xmlns:r="http://schemas.openxmlformats.org/officeDocument/2006/relationships" id="270" r:id="R44abb075dc314acb"/>
-    <p:sldId xmlns:r="http://schemas.openxmlformats.org/officeDocument/2006/relationships" id="271" r:id="R17e1dc8fa4c44179"/>
+    <p:sldId xmlns:r="http://schemas.openxmlformats.org/officeDocument/2006/relationships" id="256" r:id="Rd692813b41ee4ecc"/>
+    <p:sldId xmlns:r="http://schemas.openxmlformats.org/officeDocument/2006/relationships" id="257" r:id="Ra5f53f05f96e4fbf"/>
+    <p:sldId xmlns:r="http://schemas.openxmlformats.org/officeDocument/2006/relationships" id="258" r:id="R17a5cf52fa4a451a"/>
+    <p:sldId xmlns:r="http://schemas.openxmlformats.org/officeDocument/2006/relationships" id="259" r:id="R26deae40a67447c4"/>
+    <p:sldId xmlns:r="http://schemas.openxmlformats.org/officeDocument/2006/relationships" id="260" r:id="Rc52a113deea840fc"/>
+    <p:sldId xmlns:r="http://schemas.openxmlformats.org/officeDocument/2006/relationships" id="261" r:id="Re488835f327d489b"/>
+    <p:sldId xmlns:r="http://schemas.openxmlformats.org/officeDocument/2006/relationships" id="262" r:id="R3239c63aba554c69"/>
+    <p:sldId xmlns:r="http://schemas.openxmlformats.org/officeDocument/2006/relationships" id="263" r:id="R72c7a10ab4644ab9"/>
+    <p:sldId xmlns:r="http://schemas.openxmlformats.org/officeDocument/2006/relationships" id="264" r:id="R8fa83eb226f24706"/>
+    <p:sldId xmlns:r="http://schemas.openxmlformats.org/officeDocument/2006/relationships" id="265" r:id="R7999cf11f6bd426c"/>
+    <p:sldId xmlns:r="http://schemas.openxmlformats.org/officeDocument/2006/relationships" id="266" r:id="Rf4f77e1ff3b14f90"/>
+    <p:sldId xmlns:r="http://schemas.openxmlformats.org/officeDocument/2006/relationships" id="267" r:id="R68dec48eba9b4e6a"/>
+    <p:sldId xmlns:r="http://schemas.openxmlformats.org/officeDocument/2006/relationships" id="268" r:id="Ra9fe400c2e83420d"/>
+    <p:sldId xmlns:r="http://schemas.openxmlformats.org/officeDocument/2006/relationships" id="269" r:id="R5cb0a78bee294002"/>
+    <p:sldId xmlns:r="http://schemas.openxmlformats.org/officeDocument/2006/relationships" id="270" r:id="R5cd6fd13a33148ba"/>
+    <p:sldId xmlns:r="http://schemas.openxmlformats.org/officeDocument/2006/relationships" id="271" r:id="R7632ff8e6dd5403e"/>
   </p:sldIdLst>
   <p:sldSz cx="12192000" cy="6858000"/>
   <p:notesSz cx="6858000" cy="9144000"/>
@@ -1243,7 +1243,7 @@
           <a:lstStyle xmlns:a="http://schemas.openxmlformats.org/drawingml/2006/main"/>
           <a:p xmlns:a="http://schemas.openxmlformats.org/drawingml/2006/main">
             <a:r>
-              <a:t>最低同伴数与 assignments 一致；两条回应可来自同一位同伴的两条具体意见。</a:t>
+              <a:t>课堂所有产出只写入 peer-review.md 与 revision-plan.md，不另立回应或优先级文件。</a:t>
             </a:r>
           </a:p>
           <a:p xmlns:a="http://schemas.openxmlformats.org/drawingml/2006/main">
@@ -1258,12 +1258,12 @@
           </a:p>
           <a:p xmlns:a="http://schemas.openxmlformats.org/drawingml/2006/main">
             <a:r>
+              <a:t>- /Users/bright/Projects/courses/graduate/course/project-template.md</a:t>
+            </a:r>
+          </a:p>
+          <a:p xmlns:a="http://schemas.openxmlformats.org/drawingml/2006/main">
+            <a:r>
               <a:t>- /Users/bright/Projects/courses/graduate/course/assignments.md</a:t>
-            </a:r>
-          </a:p>
-          <a:p xmlns:a="http://schemas.openxmlformats.org/drawingml/2006/main">
-            <a:r>
-              <a:t>- /Users/bright/Projects/courses/graduate/lessons/lesson-15/teaching-plan.md</a:t>
             </a:r>
           </a:p>
           <a:p xmlns:a="http://schemas.openxmlformats.org/drawingml/2006/main">
@@ -1889,7 +1889,7 @@
           <p:nvPr/>
         </p:nvPicPr>
         <p:blipFill>
-          <a:blip xmlns:r="http://schemas.openxmlformats.org/officeDocument/2006/relationships" xmlns:a="http://schemas.openxmlformats.org/drawingml/2006/main" r:embed="Rbd42ca24292d446a">
+          <a:blip xmlns:r="http://schemas.openxmlformats.org/officeDocument/2006/relationships" xmlns:a="http://schemas.openxmlformats.org/drawingml/2006/main" r:embed="R98318a7b53314937">
             <a:duotone>
               <a:prstClr val="black"/>
               <a:schemeClr val="accent1">
@@ -2067,7 +2067,7 @@
           <p:nvPr/>
         </p:nvPicPr>
         <p:blipFill rotWithShape="1">
-          <a:blip xmlns:r="http://schemas.openxmlformats.org/officeDocument/2006/relationships" xmlns:a="http://schemas.openxmlformats.org/drawingml/2006/main" r:embed="Rb6b8b0ee3b394ecf"/>
+          <a:blip xmlns:r="http://schemas.openxmlformats.org/officeDocument/2006/relationships" xmlns:a="http://schemas.openxmlformats.org/drawingml/2006/main" r:embed="R70de640bcf904b5c"/>
           <a:srcRect xmlns:a="http://schemas.openxmlformats.org/drawingml/2006/main" l="74359" t="0" r="1346" b="0"/>
           <a:stretch xmlns:a="http://schemas.openxmlformats.org/drawingml/2006/main"/>
         </p:blipFill>
@@ -2090,7 +2090,7 @@
           <p:nvPr/>
         </p:nvPicPr>
         <p:blipFill rotWithShape="1">
-          <a:blip xmlns:r="http://schemas.openxmlformats.org/officeDocument/2006/relationships" xmlns:a="http://schemas.openxmlformats.org/drawingml/2006/main" r:embed="R94e81ff4820341e6">
+          <a:blip xmlns:r="http://schemas.openxmlformats.org/officeDocument/2006/relationships" xmlns:a="http://schemas.openxmlformats.org/drawingml/2006/main" r:embed="Rc4197b1a581b4bc3">
             <a:alphaModFix amt="35000"/>
           </a:blip>
           <a:srcRect xmlns:a="http://schemas.openxmlformats.org/drawingml/2006/main" l="0" t="9831" r="0" b="36385"/>
@@ -2352,7 +2352,7 @@
           <p:nvPr/>
         </p:nvPicPr>
         <p:blipFill>
-          <a:blip xmlns:r="http://schemas.openxmlformats.org/officeDocument/2006/relationships" xmlns:a="http://schemas.openxmlformats.org/drawingml/2006/main" r:embed="R9ef483f8bca54222"/>
+          <a:blip xmlns:r="http://schemas.openxmlformats.org/officeDocument/2006/relationships" xmlns:a="http://schemas.openxmlformats.org/drawingml/2006/main" r:embed="R2acd09d358dd407f"/>
           <a:srcRect xmlns:a="http://schemas.openxmlformats.org/drawingml/2006/main" l="0" t="0" r="54251" b="0"/>
           <a:stretch xmlns:a="http://schemas.openxmlformats.org/drawingml/2006/main"/>
         </p:blipFill>
@@ -2609,7 +2609,7 @@
           <p:nvPr/>
         </p:nvPicPr>
         <p:blipFill rotWithShape="1">
-          <a:blip xmlns:r="http://schemas.openxmlformats.org/officeDocument/2006/relationships" xmlns:a="http://schemas.openxmlformats.org/drawingml/2006/main" r:embed="Rc2724e1b9bce4a20"/>
+          <a:blip xmlns:r="http://schemas.openxmlformats.org/officeDocument/2006/relationships" xmlns:a="http://schemas.openxmlformats.org/drawingml/2006/main" r:embed="R9aa75883933e489b"/>
           <a:srcRect xmlns:a="http://schemas.openxmlformats.org/drawingml/2006/main" l="0" t="0" r="1346" b="0"/>
           <a:stretch xmlns:a="http://schemas.openxmlformats.org/drawingml/2006/main"/>
         </p:blipFill>
@@ -2792,7 +2792,7 @@
           <p:nvPr/>
         </p:nvPicPr>
         <p:blipFill>
-          <a:blip xmlns:r="http://schemas.openxmlformats.org/officeDocument/2006/relationships" xmlns:a="http://schemas.openxmlformats.org/drawingml/2006/main" r:embed="R6b6292ad342640ef"/>
+          <a:blip xmlns:r="http://schemas.openxmlformats.org/officeDocument/2006/relationships" xmlns:a="http://schemas.openxmlformats.org/drawingml/2006/main" r:embed="R521a821b86174aa6"/>
           <a:stretch xmlns:a="http://schemas.openxmlformats.org/drawingml/2006/main">
             <a:fillRect l="0" t="0" r="0" b="0"/>
           </a:stretch>
@@ -2888,7 +2888,7 @@
           <p:nvPr/>
         </p:nvPicPr>
         <p:blipFill>
-          <a:blip xmlns:r="http://schemas.openxmlformats.org/officeDocument/2006/relationships" xmlns:a="http://schemas.openxmlformats.org/drawingml/2006/main" r:embed="R6386a38eb8424b97">
+          <a:blip xmlns:r="http://schemas.openxmlformats.org/officeDocument/2006/relationships" xmlns:a="http://schemas.openxmlformats.org/drawingml/2006/main" r:embed="R810444e1838a45ec">
             <a:duotone>
               <a:prstClr val="black"/>
               <a:schemeClr val="accent1">
@@ -3055,7 +3055,7 @@
           <p:nvPr/>
         </p:nvPicPr>
         <p:blipFill rotWithShape="1">
-          <a:blip xmlns:r="http://schemas.openxmlformats.org/officeDocument/2006/relationships" xmlns:a="http://schemas.openxmlformats.org/drawingml/2006/main" r:embed="R0fc3afd104be4d60">
+          <a:blip xmlns:r="http://schemas.openxmlformats.org/officeDocument/2006/relationships" xmlns:a="http://schemas.openxmlformats.org/drawingml/2006/main" r:embed="R6d5181a1c08d46c4">
             <a:alphaModFix amt="20000"/>
             <a:duotone>
               <a:schemeClr val="accent4">
@@ -3153,10 +3153,10 @@
   </p:cSld>
   <p:clrMap bg1="lt1" tx1="dk1" bg2="lt2" tx2="dk2" accent1="accent1" accent2="accent2" accent3="accent3" accent4="accent4" accent5="accent5" accent6="accent6" hlink="hlink" folHlink="folHlink"/>
   <p:sldLayoutIdLst>
-    <p:sldLayoutId xmlns:r="http://schemas.openxmlformats.org/officeDocument/2006/relationships" id="2147483649" r:id="R71d89d71b41a4dd5"/>
-    <p:sldLayoutId xmlns:r="http://schemas.openxmlformats.org/officeDocument/2006/relationships" id="2147483650" r:id="R9dcc378b1824458a"/>
-    <p:sldLayoutId xmlns:r="http://schemas.openxmlformats.org/officeDocument/2006/relationships" id="2147483651" r:id="Ra4058a80f1c548e9"/>
-    <p:sldLayoutId xmlns:r="http://schemas.openxmlformats.org/officeDocument/2006/relationships" id="2147483652" r:id="R9b63376f62e6477b"/>
+    <p:sldLayoutId xmlns:r="http://schemas.openxmlformats.org/officeDocument/2006/relationships" id="2147483649" r:id="Rd17c2e73286f41a4"/>
+    <p:sldLayoutId xmlns:r="http://schemas.openxmlformats.org/officeDocument/2006/relationships" id="2147483650" r:id="Rf0a2d75779044a8f"/>
+    <p:sldLayoutId xmlns:r="http://schemas.openxmlformats.org/officeDocument/2006/relationships" id="2147483651" r:id="R84c8029bf03f41c4"/>
+    <p:sldLayoutId xmlns:r="http://schemas.openxmlformats.org/officeDocument/2006/relationships" id="2147483652" r:id="R8ca82254d4f74843"/>
   </p:sldLayoutIdLst>
   <p:hf hdr="0" ftr="0" dt="0"/>
   <p:txStyles>
@@ -3960,7 +3960,7 @@
           <p:cNvPr id="6" name="time">
             <a:extLst xmlns:a="http://schemas.openxmlformats.org/drawingml/2006/main">
               <a:ext uri="{FF2B5EF4-FFF2-40B4-BE49-F238E27FC236}">
-                <a16:creationId xmlns:a16="http://schemas.microsoft.com/office/drawing/2014/main" id="{49177650-FAC3-4091-AC85-40B92387AA7E}"/>
+                <a16:creationId xmlns:a16="http://schemas.microsoft.com/office/drawing/2014/main" id="{8FC6C70C-4ED0-4912-89A2-13112C78C5C1}"/>
               </a:ext>
             </a:extLst>
           </p:cNvPr>
@@ -4021,7 +4021,7 @@
           <p:cNvPr id="7" name="span">
             <a:extLst xmlns:a="http://schemas.openxmlformats.org/drawingml/2006/main">
               <a:ext uri="{FF2B5EF4-FFF2-40B4-BE49-F238E27FC236}">
-                <a16:creationId xmlns:a16="http://schemas.microsoft.com/office/drawing/2014/main" id="{E56085B7-9F22-44E0-9F4C-341BD7A95410}"/>
+                <a16:creationId xmlns:a16="http://schemas.microsoft.com/office/drawing/2014/main" id="{78FFB4F1-853C-4AD2-BD0A-27BD72CAC498}"/>
               </a:ext>
             </a:extLst>
           </p:cNvPr>
@@ -4078,7 +4078,7 @@
           <p:cNvPr id="8" name="p10r0">
             <a:extLst xmlns:a="http://schemas.openxmlformats.org/drawingml/2006/main">
               <a:ext uri="{FF2B5EF4-FFF2-40B4-BE49-F238E27FC236}">
-                <a16:creationId xmlns:a16="http://schemas.microsoft.com/office/drawing/2014/main" id="{7E1E9382-DCD1-45A8-9B18-0A6F11BCBFE3}"/>
+                <a16:creationId xmlns:a16="http://schemas.microsoft.com/office/drawing/2014/main" id="{1CFEB519-F28B-4849-A4CE-77CE086BC5B2}"/>
               </a:ext>
             </a:extLst>
           </p:cNvPr>
@@ -4139,7 +4139,7 @@
           <p:cNvPr id="9" name="p10r1">
             <a:extLst xmlns:a="http://schemas.openxmlformats.org/drawingml/2006/main">
               <a:ext uri="{FF2B5EF4-FFF2-40B4-BE49-F238E27FC236}">
-                <a16:creationId xmlns:a16="http://schemas.microsoft.com/office/drawing/2014/main" id="{F97FD890-2FF9-4241-AFBA-678ACC1192B3}"/>
+                <a16:creationId xmlns:a16="http://schemas.microsoft.com/office/drawing/2014/main" id="{3B042A0E-60E7-4884-9BC8-2D42DC778918}"/>
               </a:ext>
             </a:extLst>
           </p:cNvPr>
@@ -4200,7 +4200,7 @@
           <p:cNvPr id="10" name="p10r2">
             <a:extLst xmlns:a="http://schemas.openxmlformats.org/drawingml/2006/main">
               <a:ext uri="{FF2B5EF4-FFF2-40B4-BE49-F238E27FC236}">
-                <a16:creationId xmlns:a16="http://schemas.microsoft.com/office/drawing/2014/main" id="{9E659155-375E-442F-9690-D37D7F74B2DD}"/>
+                <a16:creationId xmlns:a16="http://schemas.microsoft.com/office/drawing/2014/main" id="{8BC70DC8-CDE3-4AA6-A21E-6641422A90B5}"/>
               </a:ext>
             </a:extLst>
           </p:cNvPr>
@@ -4261,7 +4261,7 @@
           <p:cNvPr id="11" name="p10r3">
             <a:extLst xmlns:a="http://schemas.openxmlformats.org/drawingml/2006/main">
               <a:ext uri="{FF2B5EF4-FFF2-40B4-BE49-F238E27FC236}">
-                <a16:creationId xmlns:a16="http://schemas.microsoft.com/office/drawing/2014/main" id="{5820F86C-305C-4141-A3DE-2956FA67F255}"/>
+                <a16:creationId xmlns:a16="http://schemas.microsoft.com/office/drawing/2014/main" id="{8D3FC7E7-506F-486F-A792-12B3F177A5F1}"/>
               </a:ext>
             </a:extLst>
           </p:cNvPr>
@@ -4322,7 +4322,7 @@
           <p:cNvPr id="12" name="p10min">
             <a:extLst xmlns:a="http://schemas.openxmlformats.org/drawingml/2006/main">
               <a:ext uri="{FF2B5EF4-FFF2-40B4-BE49-F238E27FC236}">
-                <a16:creationId xmlns:a16="http://schemas.microsoft.com/office/drawing/2014/main" id="{93033F9C-4493-416A-9015-13005958DACD}"/>
+                <a16:creationId xmlns:a16="http://schemas.microsoft.com/office/drawing/2014/main" id="{06D566D7-1077-46CB-AFD5-39309ADABB95}"/>
               </a:ext>
             </a:extLst>
           </p:cNvPr>
@@ -4405,7 +4405,7 @@
           <p:cNvPr id="13" name="p10c">
             <a:extLst xmlns:a="http://schemas.openxmlformats.org/drawingml/2006/main">
               <a:ext uri="{FF2B5EF4-FFF2-40B4-BE49-F238E27FC236}">
-                <a16:creationId xmlns:a16="http://schemas.microsoft.com/office/drawing/2014/main" id="{8F5B2DB6-4B9A-4D81-98BB-039D4754D7CE}"/>
+                <a16:creationId xmlns:a16="http://schemas.microsoft.com/office/drawing/2014/main" id="{0DFA30BC-ACAE-4626-8583-7AEAD41F274C}"/>
               </a:ext>
             </a:extLst>
           </p:cNvPr>
@@ -4561,7 +4561,7 @@
           <p:cNvPr id="6" name="time">
             <a:extLst xmlns:a="http://schemas.openxmlformats.org/drawingml/2006/main">
               <a:ext uri="{FF2B5EF4-FFF2-40B4-BE49-F238E27FC236}">
-                <a16:creationId xmlns:a16="http://schemas.microsoft.com/office/drawing/2014/main" id="{116725B3-7323-4F8E-87E4-E833BE5F3255}"/>
+                <a16:creationId xmlns:a16="http://schemas.microsoft.com/office/drawing/2014/main" id="{5BB5F99E-0CF9-4C71-A1B2-165D13C333CA}"/>
               </a:ext>
             </a:extLst>
           </p:cNvPr>
@@ -4618,7 +4618,7 @@
           <p:cNvPr id="7" name="p11a0">
             <a:extLst xmlns:a="http://schemas.openxmlformats.org/drawingml/2006/main">
               <a:ext uri="{FF2B5EF4-FFF2-40B4-BE49-F238E27FC236}">
-                <a16:creationId xmlns:a16="http://schemas.microsoft.com/office/drawing/2014/main" id="{7599A669-7769-4988-8AEC-61D9E60EEEB5}"/>
+                <a16:creationId xmlns:a16="http://schemas.microsoft.com/office/drawing/2014/main" id="{7AF0407E-66E4-4DB3-9EB5-33A84E039F07}"/>
               </a:ext>
             </a:extLst>
           </p:cNvPr>
@@ -4679,7 +4679,7 @@
           <p:cNvPr id="8" name="p11b0">
             <a:extLst xmlns:a="http://schemas.openxmlformats.org/drawingml/2006/main">
               <a:ext uri="{FF2B5EF4-FFF2-40B4-BE49-F238E27FC236}">
-                <a16:creationId xmlns:a16="http://schemas.microsoft.com/office/drawing/2014/main" id="{CF1C0FA6-885E-4CC4-A502-9A96D0994E9E}"/>
+                <a16:creationId xmlns:a16="http://schemas.microsoft.com/office/drawing/2014/main" id="{61ED8FF1-7EAA-4297-9552-D8A724372592}"/>
               </a:ext>
             </a:extLst>
           </p:cNvPr>
@@ -4738,7 +4738,7 @@
           <p:cNvPr id="9" name="p11a1">
             <a:extLst xmlns:a="http://schemas.openxmlformats.org/drawingml/2006/main">
               <a:ext uri="{FF2B5EF4-FFF2-40B4-BE49-F238E27FC236}">
-                <a16:creationId xmlns:a16="http://schemas.microsoft.com/office/drawing/2014/main" id="{BEF88B02-5487-4121-90A6-132F5EB1AF1A}"/>
+                <a16:creationId xmlns:a16="http://schemas.microsoft.com/office/drawing/2014/main" id="{2E22C8C0-9B5F-4536-8A6E-42BD38265C3B}"/>
               </a:ext>
             </a:extLst>
           </p:cNvPr>
@@ -4799,7 +4799,7 @@
           <p:cNvPr id="10" name="p11b1">
             <a:extLst xmlns:a="http://schemas.openxmlformats.org/drawingml/2006/main">
               <a:ext uri="{FF2B5EF4-FFF2-40B4-BE49-F238E27FC236}">
-                <a16:creationId xmlns:a16="http://schemas.microsoft.com/office/drawing/2014/main" id="{0345E621-0D15-4662-9772-7FD45C1736A5}"/>
+                <a16:creationId xmlns:a16="http://schemas.microsoft.com/office/drawing/2014/main" id="{F9C445A9-0F98-4B2A-88AB-F48FC15F58EC}"/>
               </a:ext>
             </a:extLst>
           </p:cNvPr>
@@ -4858,7 +4858,7 @@
           <p:cNvPr id="11" name="p11a2">
             <a:extLst xmlns:a="http://schemas.openxmlformats.org/drawingml/2006/main">
               <a:ext uri="{FF2B5EF4-FFF2-40B4-BE49-F238E27FC236}">
-                <a16:creationId xmlns:a16="http://schemas.microsoft.com/office/drawing/2014/main" id="{0E710C4B-CA4B-4130-8367-4D3687F9831B}"/>
+                <a16:creationId xmlns:a16="http://schemas.microsoft.com/office/drawing/2014/main" id="{D441FDCB-AAA7-40EF-BAA2-5DEEE5B03540}"/>
               </a:ext>
             </a:extLst>
           </p:cNvPr>
@@ -4919,7 +4919,7 @@
           <p:cNvPr id="12" name="p11b2">
             <a:extLst xmlns:a="http://schemas.openxmlformats.org/drawingml/2006/main">
               <a:ext uri="{FF2B5EF4-FFF2-40B4-BE49-F238E27FC236}">
-                <a16:creationId xmlns:a16="http://schemas.microsoft.com/office/drawing/2014/main" id="{70C24EA3-988F-4FF1-85C2-B2BDE4F97D2F}"/>
+                <a16:creationId xmlns:a16="http://schemas.microsoft.com/office/drawing/2014/main" id="{CEA21CB4-73B7-4CC9-9157-450E92897C70}"/>
               </a:ext>
             </a:extLst>
           </p:cNvPr>
@@ -4978,7 +4978,7 @@
           <p:cNvPr id="13" name="p11a3">
             <a:extLst xmlns:a="http://schemas.openxmlformats.org/drawingml/2006/main">
               <a:ext uri="{FF2B5EF4-FFF2-40B4-BE49-F238E27FC236}">
-                <a16:creationId xmlns:a16="http://schemas.microsoft.com/office/drawing/2014/main" id="{E74C47E3-0C93-4C82-AE1E-9A33478FBC6B}"/>
+                <a16:creationId xmlns:a16="http://schemas.microsoft.com/office/drawing/2014/main" id="{1D1AF4FA-A8A0-4FFC-8147-3356B8D2724B}"/>
               </a:ext>
             </a:extLst>
           </p:cNvPr>
@@ -5039,7 +5039,7 @@
           <p:cNvPr id="14" name="p11b3">
             <a:extLst xmlns:a="http://schemas.openxmlformats.org/drawingml/2006/main">
               <a:ext uri="{FF2B5EF4-FFF2-40B4-BE49-F238E27FC236}">
-                <a16:creationId xmlns:a16="http://schemas.microsoft.com/office/drawing/2014/main" id="{F7E48A1E-96BD-4D9C-AA5B-E2359FBCC8EC}"/>
+                <a16:creationId xmlns:a16="http://schemas.microsoft.com/office/drawing/2014/main" id="{86B0AF73-1487-4D86-80B8-9AC0DF836704}"/>
               </a:ext>
             </a:extLst>
           </p:cNvPr>
@@ -5098,7 +5098,7 @@
           <p:cNvPr id="15" name="p11fields">
             <a:extLst xmlns:a="http://schemas.openxmlformats.org/drawingml/2006/main">
               <a:ext uri="{FF2B5EF4-FFF2-40B4-BE49-F238E27FC236}">
-                <a16:creationId xmlns:a16="http://schemas.microsoft.com/office/drawing/2014/main" id="{36460CD8-53AF-4693-B4E1-46EC6CDC3945}"/>
+                <a16:creationId xmlns:a16="http://schemas.microsoft.com/office/drawing/2014/main" id="{2F53D7CE-23DB-4524-B39B-DE1268ECB935}"/>
               </a:ext>
             </a:extLst>
           </p:cNvPr>
@@ -5157,7 +5157,7 @@
           <p:cNvPr id="16" name="p11c">
             <a:extLst xmlns:a="http://schemas.openxmlformats.org/drawingml/2006/main">
               <a:ext uri="{FF2B5EF4-FFF2-40B4-BE49-F238E27FC236}">
-                <a16:creationId xmlns:a16="http://schemas.microsoft.com/office/drawing/2014/main" id="{7822BEFA-A051-45B2-BAB5-7869F23BBA14}"/>
+                <a16:creationId xmlns:a16="http://schemas.microsoft.com/office/drawing/2014/main" id="{1D10DBFA-C660-40B3-8121-2AA46D51AA39}"/>
               </a:ext>
             </a:extLst>
           </p:cNvPr>
@@ -5313,7 +5313,7 @@
           <p:cNvPr id="6" name="p12n0">
             <a:extLst xmlns:a="http://schemas.openxmlformats.org/drawingml/2006/main">
               <a:ext uri="{FF2B5EF4-FFF2-40B4-BE49-F238E27FC236}">
-                <a16:creationId xmlns:a16="http://schemas.microsoft.com/office/drawing/2014/main" id="{5E66815D-35A5-4012-B9A3-521435337F48}"/>
+                <a16:creationId xmlns:a16="http://schemas.microsoft.com/office/drawing/2014/main" id="{E667E7E1-1433-4285-A9B6-50FE06662182}"/>
               </a:ext>
             </a:extLst>
           </p:cNvPr>
@@ -5356,7 +5356,7 @@
               </a:defRPr>
             </a:pPr>
             <a:r>
-              <a:rPr sz="1275" b="1">
+              <a:rPr sz="1800" b="1">
                 <a:solidFill>
                   <a:srgbClr val="FFFFFF"/>
                 </a:solidFill>
@@ -5374,7 +5374,7 @@
           <p:cNvPr id="7" name="p12t0">
             <a:extLst xmlns:a="http://schemas.openxmlformats.org/drawingml/2006/main">
               <a:ext uri="{FF2B5EF4-FFF2-40B4-BE49-F238E27FC236}">
-                <a16:creationId xmlns:a16="http://schemas.microsoft.com/office/drawing/2014/main" id="{95FFAC9D-3A45-425D-946C-2CF32682DD2A}"/>
+                <a16:creationId xmlns:a16="http://schemas.microsoft.com/office/drawing/2014/main" id="{586E048E-BEFF-44E9-9115-63979C43E174}"/>
               </a:ext>
             </a:extLst>
           </p:cNvPr>
@@ -5386,7 +5386,7 @@
         <p:spPr>
           <a:xfrm xmlns:a="http://schemas.openxmlformats.org/drawingml/2006/main">
             <a:off x="1047750" y="952500"/>
-            <a:ext cx="4000500" cy="495300"/>
+            <a:ext cx="5067300" cy="495300"/>
           </a:xfrm>
           <a:prstGeom xmlns:a="http://schemas.openxmlformats.org/drawingml/2006/main" prst="rect">
             <a:avLst/>
@@ -5415,7 +5415,7 @@
               </a:defRPr>
             </a:pPr>
             <a:r>
-              <a:rPr sz="1275" b="1">
+              <a:rPr sz="1800" b="1">
                 <a:solidFill>
                   <a:srgbClr val="263746"/>
                 </a:solidFill>
@@ -5430,71 +5430,10 @@
       </p:sp>
       <p:sp>
         <p:nvSpPr>
-          <p:cNvPr id="8" name="p12s0">
-            <a:extLst xmlns:a="http://schemas.openxmlformats.org/drawingml/2006/main">
-              <a:ext uri="{FF2B5EF4-FFF2-40B4-BE49-F238E27FC236}">
-                <a16:creationId xmlns:a16="http://schemas.microsoft.com/office/drawing/2014/main" id="{D4B4A904-B9E6-4831-90DD-327CD7430E41}"/>
-              </a:ext>
-            </a:extLst>
-          </p:cNvPr>
-          <p:cNvSpPr>
-            <a:spLocks xmlns:a="http://schemas.openxmlformats.org/drawingml/2006/main" noGrp="1"/>
-          </p:cNvSpPr>
-          <p:nvPr/>
-        </p:nvSpPr>
-        <p:spPr>
-          <a:xfrm xmlns:a="http://schemas.openxmlformats.org/drawingml/2006/main">
-            <a:off x="5143500" y="952500"/>
-            <a:ext cx="990600" cy="495300"/>
-          </a:xfrm>
-          <a:prstGeom xmlns:a="http://schemas.openxmlformats.org/drawingml/2006/main" prst="rect">
-            <a:avLst/>
-          </a:prstGeom>
-          <a:solidFill xmlns:a="http://schemas.openxmlformats.org/drawingml/2006/main">
-            <a:srgbClr val="FFFFFF"/>
-          </a:solidFill>
-          <a:ln xmlns:a="http://schemas.openxmlformats.org/drawingml/2006/main" w="9525">
-            <a:solidFill>
-              <a:srgbClr val="D6DDE2"/>
-            </a:solidFill>
-            <a:prstDash val="solid"/>
-          </a:ln>
-        </p:spPr>
-        <p:txBody>
-          <a:bodyPr xmlns:a="http://schemas.openxmlformats.org/drawingml/2006/main" lIns="76200" tIns="38100" rIns="76200" bIns="38100" anchor="ctr"/>
-          <a:lstStyle xmlns:a="http://schemas.openxmlformats.org/drawingml/2006/main"/>
-          <a:p xmlns:a="http://schemas.openxmlformats.org/drawingml/2006/main">
-            <a:pPr algn="ctr">
-              <a:lnSpc>
-                <a:spcPct val="110000"/>
-              </a:lnSpc>
-              <a:buNone/>
-              <a:defRPr sz="975" b="1">
-                <a:solidFill>
-                  <a:srgbClr val="667684"/>
-                </a:solidFill>
-              </a:defRPr>
-            </a:pPr>
-            <a:r>
-              <a:rPr sz="975" b="1">
-                <a:solidFill>
-                  <a:srgbClr val="667684"/>
-                </a:solidFill>
-                <a:latin typeface="Microsoft YaHei"/>
-                <a:ea typeface="Microsoft YaHei"/>
-                <a:cs typeface="Microsoft YaHei"/>
-              </a:rPr>
-              <a:t>□ 满足  □ 部分  □ 未覆盖</a:t>
-            </a:r>
-          </a:p>
-        </p:txBody>
-      </p:sp>
-      <p:sp>
-        <p:nvSpPr>
           <p:cNvPr id="9" name="p12n1">
             <a:extLst xmlns:a="http://schemas.openxmlformats.org/drawingml/2006/main">
               <a:ext uri="{FF2B5EF4-FFF2-40B4-BE49-F238E27FC236}">
-                <a16:creationId xmlns:a16="http://schemas.microsoft.com/office/drawing/2014/main" id="{FB39A45E-65E1-403F-A818-D435EB38C1D4}"/>
+                <a16:creationId xmlns:a16="http://schemas.microsoft.com/office/drawing/2014/main" id="{42E4EF02-E7C1-4FB1-98F9-9BE4D0FC370C}"/>
               </a:ext>
             </a:extLst>
           </p:cNvPr>
@@ -5537,7 +5476,7 @@
               </a:defRPr>
             </a:pPr>
             <a:r>
-              <a:rPr sz="1275" b="1">
+              <a:rPr sz="1800" b="1">
                 <a:solidFill>
                   <a:srgbClr val="FFFFFF"/>
                 </a:solidFill>
@@ -5555,7 +5494,7 @@
           <p:cNvPr id="10" name="p12t1">
             <a:extLst xmlns:a="http://schemas.openxmlformats.org/drawingml/2006/main">
               <a:ext uri="{FF2B5EF4-FFF2-40B4-BE49-F238E27FC236}">
-                <a16:creationId xmlns:a16="http://schemas.microsoft.com/office/drawing/2014/main" id="{4BB5266B-5219-4AD5-84D5-8E4EC78B9361}"/>
+                <a16:creationId xmlns:a16="http://schemas.microsoft.com/office/drawing/2014/main" id="{B7CEE97B-8328-48E5-91BC-FD0B47DFB690}"/>
               </a:ext>
             </a:extLst>
           </p:cNvPr>
@@ -5567,7 +5506,7 @@
         <p:spPr>
           <a:xfrm xmlns:a="http://schemas.openxmlformats.org/drawingml/2006/main">
             <a:off x="1047750" y="1733550"/>
-            <a:ext cx="4000500" cy="495300"/>
+            <a:ext cx="5067300" cy="495300"/>
           </a:xfrm>
           <a:prstGeom xmlns:a="http://schemas.openxmlformats.org/drawingml/2006/main" prst="rect">
             <a:avLst/>
@@ -5596,7 +5535,7 @@
               </a:defRPr>
             </a:pPr>
             <a:r>
-              <a:rPr sz="1275" b="1">
+              <a:rPr sz="1800" b="1">
                 <a:solidFill>
                   <a:srgbClr val="263746"/>
                 </a:solidFill>
@@ -5611,71 +5550,10 @@
       </p:sp>
       <p:sp>
         <p:nvSpPr>
-          <p:cNvPr id="11" name="p12s1">
-            <a:extLst xmlns:a="http://schemas.openxmlformats.org/drawingml/2006/main">
-              <a:ext uri="{FF2B5EF4-FFF2-40B4-BE49-F238E27FC236}">
-                <a16:creationId xmlns:a16="http://schemas.microsoft.com/office/drawing/2014/main" id="{229BDF5D-B4D3-4668-9CB3-E314EAB21980}"/>
-              </a:ext>
-            </a:extLst>
-          </p:cNvPr>
-          <p:cNvSpPr>
-            <a:spLocks xmlns:a="http://schemas.openxmlformats.org/drawingml/2006/main" noGrp="1"/>
-          </p:cNvSpPr>
-          <p:nvPr/>
-        </p:nvSpPr>
-        <p:spPr>
-          <a:xfrm xmlns:a="http://schemas.openxmlformats.org/drawingml/2006/main">
-            <a:off x="5143500" y="1733550"/>
-            <a:ext cx="990600" cy="495300"/>
-          </a:xfrm>
-          <a:prstGeom xmlns:a="http://schemas.openxmlformats.org/drawingml/2006/main" prst="rect">
-            <a:avLst/>
-          </a:prstGeom>
-          <a:solidFill xmlns:a="http://schemas.openxmlformats.org/drawingml/2006/main">
-            <a:srgbClr val="FFFFFF"/>
-          </a:solidFill>
-          <a:ln xmlns:a="http://schemas.openxmlformats.org/drawingml/2006/main" w="9525">
-            <a:solidFill>
-              <a:srgbClr val="D6DDE2"/>
-            </a:solidFill>
-            <a:prstDash val="solid"/>
-          </a:ln>
-        </p:spPr>
-        <p:txBody>
-          <a:bodyPr xmlns:a="http://schemas.openxmlformats.org/drawingml/2006/main" lIns="76200" tIns="38100" rIns="76200" bIns="38100" anchor="ctr"/>
-          <a:lstStyle xmlns:a="http://schemas.openxmlformats.org/drawingml/2006/main"/>
-          <a:p xmlns:a="http://schemas.openxmlformats.org/drawingml/2006/main">
-            <a:pPr algn="ctr">
-              <a:lnSpc>
-                <a:spcPct val="110000"/>
-              </a:lnSpc>
-              <a:buNone/>
-              <a:defRPr sz="975" b="1">
-                <a:solidFill>
-                  <a:srgbClr val="667684"/>
-                </a:solidFill>
-              </a:defRPr>
-            </a:pPr>
-            <a:r>
-              <a:rPr sz="975" b="1">
-                <a:solidFill>
-                  <a:srgbClr val="667684"/>
-                </a:solidFill>
-                <a:latin typeface="Microsoft YaHei"/>
-                <a:ea typeface="Microsoft YaHei"/>
-                <a:cs typeface="Microsoft YaHei"/>
-              </a:rPr>
-              <a:t>□ 满足  □ 部分  □ 未覆盖</a:t>
-            </a:r>
-          </a:p>
-        </p:txBody>
-      </p:sp>
-      <p:sp>
-        <p:nvSpPr>
           <p:cNvPr id="12" name="p12n2">
             <a:extLst xmlns:a="http://schemas.openxmlformats.org/drawingml/2006/main">
               <a:ext uri="{FF2B5EF4-FFF2-40B4-BE49-F238E27FC236}">
-                <a16:creationId xmlns:a16="http://schemas.microsoft.com/office/drawing/2014/main" id="{593A4F5B-5A83-4074-B3A4-1619EC11FDC2}"/>
+                <a16:creationId xmlns:a16="http://schemas.microsoft.com/office/drawing/2014/main" id="{25E03CFC-6E72-491D-A302-56EE4D72FE32}"/>
               </a:ext>
             </a:extLst>
           </p:cNvPr>
@@ -5718,7 +5596,7 @@
               </a:defRPr>
             </a:pPr>
             <a:r>
-              <a:rPr sz="1275" b="1">
+              <a:rPr sz="1800" b="1">
                 <a:solidFill>
                   <a:srgbClr val="FFFFFF"/>
                 </a:solidFill>
@@ -5736,7 +5614,7 @@
           <p:cNvPr id="13" name="p12t2">
             <a:extLst xmlns:a="http://schemas.openxmlformats.org/drawingml/2006/main">
               <a:ext uri="{FF2B5EF4-FFF2-40B4-BE49-F238E27FC236}">
-                <a16:creationId xmlns:a16="http://schemas.microsoft.com/office/drawing/2014/main" id="{5D532592-1798-49DC-B9E3-016F663AAF8F}"/>
+                <a16:creationId xmlns:a16="http://schemas.microsoft.com/office/drawing/2014/main" id="{276975E1-39A9-4285-89F7-D9EDEB79E74A}"/>
               </a:ext>
             </a:extLst>
           </p:cNvPr>
@@ -5748,7 +5626,7 @@
         <p:spPr>
           <a:xfrm xmlns:a="http://schemas.openxmlformats.org/drawingml/2006/main">
             <a:off x="1047750" y="2514600"/>
-            <a:ext cx="4000500" cy="495300"/>
+            <a:ext cx="5067300" cy="495300"/>
           </a:xfrm>
           <a:prstGeom xmlns:a="http://schemas.openxmlformats.org/drawingml/2006/main" prst="rect">
             <a:avLst/>
@@ -5777,7 +5655,7 @@
               </a:defRPr>
             </a:pPr>
             <a:r>
-              <a:rPr sz="1275" b="1">
+              <a:rPr sz="1800" b="1">
                 <a:solidFill>
                   <a:srgbClr val="263746"/>
                 </a:solidFill>
@@ -5792,71 +5670,10 @@
       </p:sp>
       <p:sp>
         <p:nvSpPr>
-          <p:cNvPr id="14" name="p12s2">
-            <a:extLst xmlns:a="http://schemas.openxmlformats.org/drawingml/2006/main">
-              <a:ext uri="{FF2B5EF4-FFF2-40B4-BE49-F238E27FC236}">
-                <a16:creationId xmlns:a16="http://schemas.microsoft.com/office/drawing/2014/main" id="{035B563D-EC41-4A95-B0E6-D445A9933B5C}"/>
-              </a:ext>
-            </a:extLst>
-          </p:cNvPr>
-          <p:cNvSpPr>
-            <a:spLocks xmlns:a="http://schemas.openxmlformats.org/drawingml/2006/main" noGrp="1"/>
-          </p:cNvSpPr>
-          <p:nvPr/>
-        </p:nvSpPr>
-        <p:spPr>
-          <a:xfrm xmlns:a="http://schemas.openxmlformats.org/drawingml/2006/main">
-            <a:off x="5143500" y="2514600"/>
-            <a:ext cx="990600" cy="495300"/>
-          </a:xfrm>
-          <a:prstGeom xmlns:a="http://schemas.openxmlformats.org/drawingml/2006/main" prst="rect">
-            <a:avLst/>
-          </a:prstGeom>
-          <a:solidFill xmlns:a="http://schemas.openxmlformats.org/drawingml/2006/main">
-            <a:srgbClr val="FFFFFF"/>
-          </a:solidFill>
-          <a:ln xmlns:a="http://schemas.openxmlformats.org/drawingml/2006/main" w="9525">
-            <a:solidFill>
-              <a:srgbClr val="D6DDE2"/>
-            </a:solidFill>
-            <a:prstDash val="solid"/>
-          </a:ln>
-        </p:spPr>
-        <p:txBody>
-          <a:bodyPr xmlns:a="http://schemas.openxmlformats.org/drawingml/2006/main" lIns="76200" tIns="38100" rIns="76200" bIns="38100" anchor="ctr"/>
-          <a:lstStyle xmlns:a="http://schemas.openxmlformats.org/drawingml/2006/main"/>
-          <a:p xmlns:a="http://schemas.openxmlformats.org/drawingml/2006/main">
-            <a:pPr algn="ctr">
-              <a:lnSpc>
-                <a:spcPct val="110000"/>
-              </a:lnSpc>
-              <a:buNone/>
-              <a:defRPr sz="975" b="1">
-                <a:solidFill>
-                  <a:srgbClr val="667684"/>
-                </a:solidFill>
-              </a:defRPr>
-            </a:pPr>
-            <a:r>
-              <a:rPr sz="975" b="1">
-                <a:solidFill>
-                  <a:srgbClr val="667684"/>
-                </a:solidFill>
-                <a:latin typeface="Microsoft YaHei"/>
-                <a:ea typeface="Microsoft YaHei"/>
-                <a:cs typeface="Microsoft YaHei"/>
-              </a:rPr>
-              <a:t>□ 满足  □ 部分  □ 未覆盖</a:t>
-            </a:r>
-          </a:p>
-        </p:txBody>
-      </p:sp>
-      <p:sp>
-        <p:nvSpPr>
           <p:cNvPr id="15" name="p12n3">
             <a:extLst xmlns:a="http://schemas.openxmlformats.org/drawingml/2006/main">
               <a:ext uri="{FF2B5EF4-FFF2-40B4-BE49-F238E27FC236}">
-                <a16:creationId xmlns:a16="http://schemas.microsoft.com/office/drawing/2014/main" id="{2519557D-63FC-4D85-8D35-CD1349F8D4D5}"/>
+                <a16:creationId xmlns:a16="http://schemas.microsoft.com/office/drawing/2014/main" id="{9381173C-045E-422D-AA41-A47FEE4C78ED}"/>
               </a:ext>
             </a:extLst>
           </p:cNvPr>
@@ -5899,7 +5716,7 @@
               </a:defRPr>
             </a:pPr>
             <a:r>
-              <a:rPr sz="1275" b="1">
+              <a:rPr sz="1800" b="1">
                 <a:solidFill>
                   <a:srgbClr val="FFFFFF"/>
                 </a:solidFill>
@@ -5917,7 +5734,7 @@
           <p:cNvPr id="16" name="p12t3">
             <a:extLst xmlns:a="http://schemas.openxmlformats.org/drawingml/2006/main">
               <a:ext uri="{FF2B5EF4-FFF2-40B4-BE49-F238E27FC236}">
-                <a16:creationId xmlns:a16="http://schemas.microsoft.com/office/drawing/2014/main" id="{A1407799-B09B-4AD6-A54F-09B23BC6E582}"/>
+                <a16:creationId xmlns:a16="http://schemas.microsoft.com/office/drawing/2014/main" id="{13049261-4166-47DC-8965-E100B97CCF5F}"/>
               </a:ext>
             </a:extLst>
           </p:cNvPr>
@@ -5929,7 +5746,7 @@
         <p:spPr>
           <a:xfrm xmlns:a="http://schemas.openxmlformats.org/drawingml/2006/main">
             <a:off x="1047750" y="3295650"/>
-            <a:ext cx="4000500" cy="495300"/>
+            <a:ext cx="5067300" cy="495300"/>
           </a:xfrm>
           <a:prstGeom xmlns:a="http://schemas.openxmlformats.org/drawingml/2006/main" prst="rect">
             <a:avLst/>
@@ -5958,7 +5775,7 @@
               </a:defRPr>
             </a:pPr>
             <a:r>
-              <a:rPr sz="1275" b="1">
+              <a:rPr sz="1800" b="1">
                 <a:solidFill>
                   <a:srgbClr val="263746"/>
                 </a:solidFill>
@@ -5973,71 +5790,10 @@
       </p:sp>
       <p:sp>
         <p:nvSpPr>
-          <p:cNvPr id="17" name="p12s3">
-            <a:extLst xmlns:a="http://schemas.openxmlformats.org/drawingml/2006/main">
-              <a:ext uri="{FF2B5EF4-FFF2-40B4-BE49-F238E27FC236}">
-                <a16:creationId xmlns:a16="http://schemas.microsoft.com/office/drawing/2014/main" id="{123DCD6B-9218-4D73-96C6-BE30AB1801C7}"/>
-              </a:ext>
-            </a:extLst>
-          </p:cNvPr>
-          <p:cNvSpPr>
-            <a:spLocks xmlns:a="http://schemas.openxmlformats.org/drawingml/2006/main" noGrp="1"/>
-          </p:cNvSpPr>
-          <p:nvPr/>
-        </p:nvSpPr>
-        <p:spPr>
-          <a:xfrm xmlns:a="http://schemas.openxmlformats.org/drawingml/2006/main">
-            <a:off x="5143500" y="3295650"/>
-            <a:ext cx="990600" cy="495300"/>
-          </a:xfrm>
-          <a:prstGeom xmlns:a="http://schemas.openxmlformats.org/drawingml/2006/main" prst="rect">
-            <a:avLst/>
-          </a:prstGeom>
-          <a:solidFill xmlns:a="http://schemas.openxmlformats.org/drawingml/2006/main">
-            <a:srgbClr val="FFFFFF"/>
-          </a:solidFill>
-          <a:ln xmlns:a="http://schemas.openxmlformats.org/drawingml/2006/main" w="9525">
-            <a:solidFill>
-              <a:srgbClr val="D6DDE2"/>
-            </a:solidFill>
-            <a:prstDash val="solid"/>
-          </a:ln>
-        </p:spPr>
-        <p:txBody>
-          <a:bodyPr xmlns:a="http://schemas.openxmlformats.org/drawingml/2006/main" lIns="76200" tIns="38100" rIns="76200" bIns="38100" anchor="ctr"/>
-          <a:lstStyle xmlns:a="http://schemas.openxmlformats.org/drawingml/2006/main"/>
-          <a:p xmlns:a="http://schemas.openxmlformats.org/drawingml/2006/main">
-            <a:pPr algn="ctr">
-              <a:lnSpc>
-                <a:spcPct val="110000"/>
-              </a:lnSpc>
-              <a:buNone/>
-              <a:defRPr sz="975" b="1">
-                <a:solidFill>
-                  <a:srgbClr val="667684"/>
-                </a:solidFill>
-              </a:defRPr>
-            </a:pPr>
-            <a:r>
-              <a:rPr sz="975" b="1">
-                <a:solidFill>
-                  <a:srgbClr val="667684"/>
-                </a:solidFill>
-                <a:latin typeface="Microsoft YaHei"/>
-                <a:ea typeface="Microsoft YaHei"/>
-                <a:cs typeface="Microsoft YaHei"/>
-              </a:rPr>
-              <a:t>□ 满足  □ 部分  □ 未覆盖</a:t>
-            </a:r>
-          </a:p>
-        </p:txBody>
-      </p:sp>
-      <p:sp>
-        <p:nvSpPr>
           <p:cNvPr id="18" name="p12n4">
             <a:extLst xmlns:a="http://schemas.openxmlformats.org/drawingml/2006/main">
               <a:ext uri="{FF2B5EF4-FFF2-40B4-BE49-F238E27FC236}">
-                <a16:creationId xmlns:a16="http://schemas.microsoft.com/office/drawing/2014/main" id="{D0DABE71-BE4C-4FB4-872F-2D0E474DB2DE}"/>
+                <a16:creationId xmlns:a16="http://schemas.microsoft.com/office/drawing/2014/main" id="{519F0B48-05DC-46F0-A132-84EC6CE7D5DB}"/>
               </a:ext>
             </a:extLst>
           </p:cNvPr>
@@ -6080,7 +5836,7 @@
               </a:defRPr>
             </a:pPr>
             <a:r>
-              <a:rPr sz="1275" b="1">
+              <a:rPr sz="1800" b="1">
                 <a:solidFill>
                   <a:srgbClr val="FFFFFF"/>
                 </a:solidFill>
@@ -6098,7 +5854,7 @@
           <p:cNvPr id="19" name="p12t4">
             <a:extLst xmlns:a="http://schemas.openxmlformats.org/drawingml/2006/main">
               <a:ext uri="{FF2B5EF4-FFF2-40B4-BE49-F238E27FC236}">
-                <a16:creationId xmlns:a16="http://schemas.microsoft.com/office/drawing/2014/main" id="{E0F14660-AC52-4980-9672-BF3A2A654BEE}"/>
+                <a16:creationId xmlns:a16="http://schemas.microsoft.com/office/drawing/2014/main" id="{881D9503-4FBE-4A04-88EE-CA68C12A5D80}"/>
               </a:ext>
             </a:extLst>
           </p:cNvPr>
@@ -6110,7 +5866,7 @@
         <p:spPr>
           <a:xfrm xmlns:a="http://schemas.openxmlformats.org/drawingml/2006/main">
             <a:off x="1047750" y="4076700"/>
-            <a:ext cx="4000500" cy="495300"/>
+            <a:ext cx="5067300" cy="495300"/>
           </a:xfrm>
           <a:prstGeom xmlns:a="http://schemas.openxmlformats.org/drawingml/2006/main" prst="rect">
             <a:avLst/>
@@ -6139,7 +5895,7 @@
               </a:defRPr>
             </a:pPr>
             <a:r>
-              <a:rPr sz="1275" b="1">
+              <a:rPr sz="1800" b="1">
                 <a:solidFill>
                   <a:srgbClr val="263746"/>
                 </a:solidFill>
@@ -6154,71 +5910,10 @@
       </p:sp>
       <p:sp>
         <p:nvSpPr>
-          <p:cNvPr id="20" name="p12s4">
-            <a:extLst xmlns:a="http://schemas.openxmlformats.org/drawingml/2006/main">
-              <a:ext uri="{FF2B5EF4-FFF2-40B4-BE49-F238E27FC236}">
-                <a16:creationId xmlns:a16="http://schemas.microsoft.com/office/drawing/2014/main" id="{B3D11D2F-B306-429D-8786-492A8A6708CC}"/>
-              </a:ext>
-            </a:extLst>
-          </p:cNvPr>
-          <p:cNvSpPr>
-            <a:spLocks xmlns:a="http://schemas.openxmlformats.org/drawingml/2006/main" noGrp="1"/>
-          </p:cNvSpPr>
-          <p:nvPr/>
-        </p:nvSpPr>
-        <p:spPr>
-          <a:xfrm xmlns:a="http://schemas.openxmlformats.org/drawingml/2006/main">
-            <a:off x="5143500" y="4076700"/>
-            <a:ext cx="990600" cy="495300"/>
-          </a:xfrm>
-          <a:prstGeom xmlns:a="http://schemas.openxmlformats.org/drawingml/2006/main" prst="rect">
-            <a:avLst/>
-          </a:prstGeom>
-          <a:solidFill xmlns:a="http://schemas.openxmlformats.org/drawingml/2006/main">
-            <a:srgbClr val="FFFFFF"/>
-          </a:solidFill>
-          <a:ln xmlns:a="http://schemas.openxmlformats.org/drawingml/2006/main" w="9525">
-            <a:solidFill>
-              <a:srgbClr val="D6DDE2"/>
-            </a:solidFill>
-            <a:prstDash val="solid"/>
-          </a:ln>
-        </p:spPr>
-        <p:txBody>
-          <a:bodyPr xmlns:a="http://schemas.openxmlformats.org/drawingml/2006/main" lIns="76200" tIns="38100" rIns="76200" bIns="38100" anchor="ctr"/>
-          <a:lstStyle xmlns:a="http://schemas.openxmlformats.org/drawingml/2006/main"/>
-          <a:p xmlns:a="http://schemas.openxmlformats.org/drawingml/2006/main">
-            <a:pPr algn="ctr">
-              <a:lnSpc>
-                <a:spcPct val="110000"/>
-              </a:lnSpc>
-              <a:buNone/>
-              <a:defRPr sz="975" b="1">
-                <a:solidFill>
-                  <a:srgbClr val="667684"/>
-                </a:solidFill>
-              </a:defRPr>
-            </a:pPr>
-            <a:r>
-              <a:rPr sz="975" b="1">
-                <a:solidFill>
-                  <a:srgbClr val="667684"/>
-                </a:solidFill>
-                <a:latin typeface="Microsoft YaHei"/>
-                <a:ea typeface="Microsoft YaHei"/>
-                <a:cs typeface="Microsoft YaHei"/>
-              </a:rPr>
-              <a:t>□ 满足  □ 部分  □ 未覆盖</a:t>
-            </a:r>
-          </a:p>
-        </p:txBody>
-      </p:sp>
-      <p:sp>
-        <p:nvSpPr>
           <p:cNvPr id="21" name="p12n5">
             <a:extLst xmlns:a="http://schemas.openxmlformats.org/drawingml/2006/main">
               <a:ext uri="{FF2B5EF4-FFF2-40B4-BE49-F238E27FC236}">
-                <a16:creationId xmlns:a16="http://schemas.microsoft.com/office/drawing/2014/main" id="{0C33AAB9-DFCC-40AA-AD10-1E1A25C4A09F}"/>
+                <a16:creationId xmlns:a16="http://schemas.microsoft.com/office/drawing/2014/main" id="{DBFB939A-AE47-424A-8C70-45D5A0F9B10F}"/>
               </a:ext>
             </a:extLst>
           </p:cNvPr>
@@ -6261,7 +5956,7 @@
               </a:defRPr>
             </a:pPr>
             <a:r>
-              <a:rPr sz="1275" b="1">
+              <a:rPr sz="1800" b="1">
                 <a:solidFill>
                   <a:srgbClr val="FFFFFF"/>
                 </a:solidFill>
@@ -6279,7 +5974,7 @@
           <p:cNvPr id="22" name="p12t5">
             <a:extLst xmlns:a="http://schemas.openxmlformats.org/drawingml/2006/main">
               <a:ext uri="{FF2B5EF4-FFF2-40B4-BE49-F238E27FC236}">
-                <a16:creationId xmlns:a16="http://schemas.microsoft.com/office/drawing/2014/main" id="{BE25F8F4-9905-4D16-8250-43D3EAA4F84A}"/>
+                <a16:creationId xmlns:a16="http://schemas.microsoft.com/office/drawing/2014/main" id="{37D355BE-B7AF-42F1-A25B-B563950E052A}"/>
               </a:ext>
             </a:extLst>
           </p:cNvPr>
@@ -6291,7 +5986,7 @@
         <p:spPr>
           <a:xfrm xmlns:a="http://schemas.openxmlformats.org/drawingml/2006/main">
             <a:off x="6896100" y="952500"/>
-            <a:ext cx="4000500" cy="495300"/>
+            <a:ext cx="5067300" cy="495300"/>
           </a:xfrm>
           <a:prstGeom xmlns:a="http://schemas.openxmlformats.org/drawingml/2006/main" prst="rect">
             <a:avLst/>
@@ -6320,7 +6015,7 @@
               </a:defRPr>
             </a:pPr>
             <a:r>
-              <a:rPr sz="1275" b="1">
+              <a:rPr sz="1800" b="1">
                 <a:solidFill>
                   <a:srgbClr val="263746"/>
                 </a:solidFill>
@@ -6335,71 +6030,10 @@
       </p:sp>
       <p:sp>
         <p:nvSpPr>
-          <p:cNvPr id="23" name="p12s5">
-            <a:extLst xmlns:a="http://schemas.openxmlformats.org/drawingml/2006/main">
-              <a:ext uri="{FF2B5EF4-FFF2-40B4-BE49-F238E27FC236}">
-                <a16:creationId xmlns:a16="http://schemas.microsoft.com/office/drawing/2014/main" id="{954F09E7-F8B8-40B5-B6C5-0D485B7C7131}"/>
-              </a:ext>
-            </a:extLst>
-          </p:cNvPr>
-          <p:cNvSpPr>
-            <a:spLocks xmlns:a="http://schemas.openxmlformats.org/drawingml/2006/main" noGrp="1"/>
-          </p:cNvSpPr>
-          <p:nvPr/>
-        </p:nvSpPr>
-        <p:spPr>
-          <a:xfrm xmlns:a="http://schemas.openxmlformats.org/drawingml/2006/main">
-            <a:off x="10991850" y="952500"/>
-            <a:ext cx="990600" cy="495300"/>
-          </a:xfrm>
-          <a:prstGeom xmlns:a="http://schemas.openxmlformats.org/drawingml/2006/main" prst="rect">
-            <a:avLst/>
-          </a:prstGeom>
-          <a:solidFill xmlns:a="http://schemas.openxmlformats.org/drawingml/2006/main">
-            <a:srgbClr val="FFFFFF"/>
-          </a:solidFill>
-          <a:ln xmlns:a="http://schemas.openxmlformats.org/drawingml/2006/main" w="9525">
-            <a:solidFill>
-              <a:srgbClr val="D6DDE2"/>
-            </a:solidFill>
-            <a:prstDash val="solid"/>
-          </a:ln>
-        </p:spPr>
-        <p:txBody>
-          <a:bodyPr xmlns:a="http://schemas.openxmlformats.org/drawingml/2006/main" lIns="76200" tIns="38100" rIns="76200" bIns="38100" anchor="ctr"/>
-          <a:lstStyle xmlns:a="http://schemas.openxmlformats.org/drawingml/2006/main"/>
-          <a:p xmlns:a="http://schemas.openxmlformats.org/drawingml/2006/main">
-            <a:pPr algn="ctr">
-              <a:lnSpc>
-                <a:spcPct val="110000"/>
-              </a:lnSpc>
-              <a:buNone/>
-              <a:defRPr sz="975" b="1">
-                <a:solidFill>
-                  <a:srgbClr val="667684"/>
-                </a:solidFill>
-              </a:defRPr>
-            </a:pPr>
-            <a:r>
-              <a:rPr sz="975" b="1">
-                <a:solidFill>
-                  <a:srgbClr val="667684"/>
-                </a:solidFill>
-                <a:latin typeface="Microsoft YaHei"/>
-                <a:ea typeface="Microsoft YaHei"/>
-                <a:cs typeface="Microsoft YaHei"/>
-              </a:rPr>
-              <a:t>□ 满足  □ 部分  □ 未覆盖</a:t>
-            </a:r>
-          </a:p>
-        </p:txBody>
-      </p:sp>
-      <p:sp>
-        <p:nvSpPr>
           <p:cNvPr id="24" name="p12n6">
             <a:extLst xmlns:a="http://schemas.openxmlformats.org/drawingml/2006/main">
               <a:ext uri="{FF2B5EF4-FFF2-40B4-BE49-F238E27FC236}">
-                <a16:creationId xmlns:a16="http://schemas.microsoft.com/office/drawing/2014/main" id="{356936F9-198A-43BD-B411-A4BE4DD9B6B0}"/>
+                <a16:creationId xmlns:a16="http://schemas.microsoft.com/office/drawing/2014/main" id="{31CC173E-4357-4268-A2B0-231FFF5CD54B}"/>
               </a:ext>
             </a:extLst>
           </p:cNvPr>
@@ -6442,7 +6076,7 @@
               </a:defRPr>
             </a:pPr>
             <a:r>
-              <a:rPr sz="1275" b="1">
+              <a:rPr sz="1800" b="1">
                 <a:solidFill>
                   <a:srgbClr val="FFFFFF"/>
                 </a:solidFill>
@@ -6460,7 +6094,7 @@
           <p:cNvPr id="25" name="p12t6">
             <a:extLst xmlns:a="http://schemas.openxmlformats.org/drawingml/2006/main">
               <a:ext uri="{FF2B5EF4-FFF2-40B4-BE49-F238E27FC236}">
-                <a16:creationId xmlns:a16="http://schemas.microsoft.com/office/drawing/2014/main" id="{492F33C9-F1AD-4066-91CA-62D6B167EFC7}"/>
+                <a16:creationId xmlns:a16="http://schemas.microsoft.com/office/drawing/2014/main" id="{BED1CC33-73D6-4138-9FDB-4EA070FDD65D}"/>
               </a:ext>
             </a:extLst>
           </p:cNvPr>
@@ -6472,7 +6106,7 @@
         <p:spPr>
           <a:xfrm xmlns:a="http://schemas.openxmlformats.org/drawingml/2006/main">
             <a:off x="6896100" y="1733550"/>
-            <a:ext cx="4000500" cy="495300"/>
+            <a:ext cx="5067300" cy="495300"/>
           </a:xfrm>
           <a:prstGeom xmlns:a="http://schemas.openxmlformats.org/drawingml/2006/main" prst="rect">
             <a:avLst/>
@@ -6501,7 +6135,7 @@
               </a:defRPr>
             </a:pPr>
             <a:r>
-              <a:rPr sz="1275" b="1">
+              <a:rPr sz="1800" b="1">
                 <a:solidFill>
                   <a:srgbClr val="263746"/>
                 </a:solidFill>
@@ -6516,71 +6150,10 @@
       </p:sp>
       <p:sp>
         <p:nvSpPr>
-          <p:cNvPr id="26" name="p12s6">
-            <a:extLst xmlns:a="http://schemas.openxmlformats.org/drawingml/2006/main">
-              <a:ext uri="{FF2B5EF4-FFF2-40B4-BE49-F238E27FC236}">
-                <a16:creationId xmlns:a16="http://schemas.microsoft.com/office/drawing/2014/main" id="{F0711EBF-323D-49E2-8E41-5CA5A0159F30}"/>
-              </a:ext>
-            </a:extLst>
-          </p:cNvPr>
-          <p:cNvSpPr>
-            <a:spLocks xmlns:a="http://schemas.openxmlformats.org/drawingml/2006/main" noGrp="1"/>
-          </p:cNvSpPr>
-          <p:nvPr/>
-        </p:nvSpPr>
-        <p:spPr>
-          <a:xfrm xmlns:a="http://schemas.openxmlformats.org/drawingml/2006/main">
-            <a:off x="10991850" y="1733550"/>
-            <a:ext cx="990600" cy="495300"/>
-          </a:xfrm>
-          <a:prstGeom xmlns:a="http://schemas.openxmlformats.org/drawingml/2006/main" prst="rect">
-            <a:avLst/>
-          </a:prstGeom>
-          <a:solidFill xmlns:a="http://schemas.openxmlformats.org/drawingml/2006/main">
-            <a:srgbClr val="FFFFFF"/>
-          </a:solidFill>
-          <a:ln xmlns:a="http://schemas.openxmlformats.org/drawingml/2006/main" w="9525">
-            <a:solidFill>
-              <a:srgbClr val="D6DDE2"/>
-            </a:solidFill>
-            <a:prstDash val="solid"/>
-          </a:ln>
-        </p:spPr>
-        <p:txBody>
-          <a:bodyPr xmlns:a="http://schemas.openxmlformats.org/drawingml/2006/main" lIns="76200" tIns="38100" rIns="76200" bIns="38100" anchor="ctr"/>
-          <a:lstStyle xmlns:a="http://schemas.openxmlformats.org/drawingml/2006/main"/>
-          <a:p xmlns:a="http://schemas.openxmlformats.org/drawingml/2006/main">
-            <a:pPr algn="ctr">
-              <a:lnSpc>
-                <a:spcPct val="110000"/>
-              </a:lnSpc>
-              <a:buNone/>
-              <a:defRPr sz="975" b="1">
-                <a:solidFill>
-                  <a:srgbClr val="667684"/>
-                </a:solidFill>
-              </a:defRPr>
-            </a:pPr>
-            <a:r>
-              <a:rPr sz="975" b="1">
-                <a:solidFill>
-                  <a:srgbClr val="667684"/>
-                </a:solidFill>
-                <a:latin typeface="Microsoft YaHei"/>
-                <a:ea typeface="Microsoft YaHei"/>
-                <a:cs typeface="Microsoft YaHei"/>
-              </a:rPr>
-              <a:t>□ 满足  □ 部分  □ 未覆盖</a:t>
-            </a:r>
-          </a:p>
-        </p:txBody>
-      </p:sp>
-      <p:sp>
-        <p:nvSpPr>
           <p:cNvPr id="27" name="p12n7">
             <a:extLst xmlns:a="http://schemas.openxmlformats.org/drawingml/2006/main">
               <a:ext uri="{FF2B5EF4-FFF2-40B4-BE49-F238E27FC236}">
-                <a16:creationId xmlns:a16="http://schemas.microsoft.com/office/drawing/2014/main" id="{4378724C-7FE3-4759-834C-9ED1BE2B13F3}"/>
+                <a16:creationId xmlns:a16="http://schemas.microsoft.com/office/drawing/2014/main" id="{00A54249-9322-4C10-846E-5F2887DE79C7}"/>
               </a:ext>
             </a:extLst>
           </p:cNvPr>
@@ -6623,7 +6196,7 @@
               </a:defRPr>
             </a:pPr>
             <a:r>
-              <a:rPr sz="1275" b="1">
+              <a:rPr sz="1800" b="1">
                 <a:solidFill>
                   <a:srgbClr val="FFFFFF"/>
                 </a:solidFill>
@@ -6641,7 +6214,7 @@
           <p:cNvPr id="28" name="p12t7">
             <a:extLst xmlns:a="http://schemas.openxmlformats.org/drawingml/2006/main">
               <a:ext uri="{FF2B5EF4-FFF2-40B4-BE49-F238E27FC236}">
-                <a16:creationId xmlns:a16="http://schemas.microsoft.com/office/drawing/2014/main" id="{D2DE1324-1F98-45E4-84C6-8DBB87162E55}"/>
+                <a16:creationId xmlns:a16="http://schemas.microsoft.com/office/drawing/2014/main" id="{F8F91DFE-ABDA-45DC-84DA-7739487819B7}"/>
               </a:ext>
             </a:extLst>
           </p:cNvPr>
@@ -6653,7 +6226,7 @@
         <p:spPr>
           <a:xfrm xmlns:a="http://schemas.openxmlformats.org/drawingml/2006/main">
             <a:off x="6896100" y="2514600"/>
-            <a:ext cx="4000500" cy="495300"/>
+            <a:ext cx="5067300" cy="495300"/>
           </a:xfrm>
           <a:prstGeom xmlns:a="http://schemas.openxmlformats.org/drawingml/2006/main" prst="rect">
             <a:avLst/>
@@ -6682,7 +6255,7 @@
               </a:defRPr>
             </a:pPr>
             <a:r>
-              <a:rPr sz="1275" b="1">
+              <a:rPr sz="1800" b="1">
                 <a:solidFill>
                   <a:srgbClr val="263746"/>
                 </a:solidFill>
@@ -6697,71 +6270,10 @@
       </p:sp>
       <p:sp>
         <p:nvSpPr>
-          <p:cNvPr id="29" name="p12s7">
-            <a:extLst xmlns:a="http://schemas.openxmlformats.org/drawingml/2006/main">
-              <a:ext uri="{FF2B5EF4-FFF2-40B4-BE49-F238E27FC236}">
-                <a16:creationId xmlns:a16="http://schemas.microsoft.com/office/drawing/2014/main" id="{7670D988-A7C3-4397-939E-F054FEAD006C}"/>
-              </a:ext>
-            </a:extLst>
-          </p:cNvPr>
-          <p:cNvSpPr>
-            <a:spLocks xmlns:a="http://schemas.openxmlformats.org/drawingml/2006/main" noGrp="1"/>
-          </p:cNvSpPr>
-          <p:nvPr/>
-        </p:nvSpPr>
-        <p:spPr>
-          <a:xfrm xmlns:a="http://schemas.openxmlformats.org/drawingml/2006/main">
-            <a:off x="10991850" y="2514600"/>
-            <a:ext cx="990600" cy="495300"/>
-          </a:xfrm>
-          <a:prstGeom xmlns:a="http://schemas.openxmlformats.org/drawingml/2006/main" prst="rect">
-            <a:avLst/>
-          </a:prstGeom>
-          <a:solidFill xmlns:a="http://schemas.openxmlformats.org/drawingml/2006/main">
-            <a:srgbClr val="FFFFFF"/>
-          </a:solidFill>
-          <a:ln xmlns:a="http://schemas.openxmlformats.org/drawingml/2006/main" w="9525">
-            <a:solidFill>
-              <a:srgbClr val="D6DDE2"/>
-            </a:solidFill>
-            <a:prstDash val="solid"/>
-          </a:ln>
-        </p:spPr>
-        <p:txBody>
-          <a:bodyPr xmlns:a="http://schemas.openxmlformats.org/drawingml/2006/main" lIns="76200" tIns="38100" rIns="76200" bIns="38100" anchor="ctr"/>
-          <a:lstStyle xmlns:a="http://schemas.openxmlformats.org/drawingml/2006/main"/>
-          <a:p xmlns:a="http://schemas.openxmlformats.org/drawingml/2006/main">
-            <a:pPr algn="ctr">
-              <a:lnSpc>
-                <a:spcPct val="110000"/>
-              </a:lnSpc>
-              <a:buNone/>
-              <a:defRPr sz="975" b="1">
-                <a:solidFill>
-                  <a:srgbClr val="667684"/>
-                </a:solidFill>
-              </a:defRPr>
-            </a:pPr>
-            <a:r>
-              <a:rPr sz="975" b="1">
-                <a:solidFill>
-                  <a:srgbClr val="667684"/>
-                </a:solidFill>
-                <a:latin typeface="Microsoft YaHei"/>
-                <a:ea typeface="Microsoft YaHei"/>
-                <a:cs typeface="Microsoft YaHei"/>
-              </a:rPr>
-              <a:t>□ 满足  □ 部分  □ 未覆盖</a:t>
-            </a:r>
-          </a:p>
-        </p:txBody>
-      </p:sp>
-      <p:sp>
-        <p:nvSpPr>
           <p:cNvPr id="30" name="p12n8">
             <a:extLst xmlns:a="http://schemas.openxmlformats.org/drawingml/2006/main">
               <a:ext uri="{FF2B5EF4-FFF2-40B4-BE49-F238E27FC236}">
-                <a16:creationId xmlns:a16="http://schemas.microsoft.com/office/drawing/2014/main" id="{D1274768-6D1F-4AE9-99C2-469F9DE0086B}"/>
+                <a16:creationId xmlns:a16="http://schemas.microsoft.com/office/drawing/2014/main" id="{4E564BF7-6C6B-4404-89D7-20DB52BFC69D}"/>
               </a:ext>
             </a:extLst>
           </p:cNvPr>
@@ -6804,7 +6316,7 @@
               </a:defRPr>
             </a:pPr>
             <a:r>
-              <a:rPr sz="1275" b="1">
+              <a:rPr sz="1800" b="1">
                 <a:solidFill>
                   <a:srgbClr val="FFFFFF"/>
                 </a:solidFill>
@@ -6822,7 +6334,7 @@
           <p:cNvPr id="31" name="p12t8">
             <a:extLst xmlns:a="http://schemas.openxmlformats.org/drawingml/2006/main">
               <a:ext uri="{FF2B5EF4-FFF2-40B4-BE49-F238E27FC236}">
-                <a16:creationId xmlns:a16="http://schemas.microsoft.com/office/drawing/2014/main" id="{8C305C73-C408-405F-91B8-9BD2A83893C3}"/>
+                <a16:creationId xmlns:a16="http://schemas.microsoft.com/office/drawing/2014/main" id="{BBEF325E-532E-45B9-858A-7ED8AD26B104}"/>
               </a:ext>
             </a:extLst>
           </p:cNvPr>
@@ -6834,7 +6346,7 @@
         <p:spPr>
           <a:xfrm xmlns:a="http://schemas.openxmlformats.org/drawingml/2006/main">
             <a:off x="6896100" y="3295650"/>
-            <a:ext cx="4000500" cy="495300"/>
+            <a:ext cx="5067300" cy="495300"/>
           </a:xfrm>
           <a:prstGeom xmlns:a="http://schemas.openxmlformats.org/drawingml/2006/main" prst="rect">
             <a:avLst/>
@@ -6863,7 +6375,7 @@
               </a:defRPr>
             </a:pPr>
             <a:r>
-              <a:rPr sz="1275" b="1">
+              <a:rPr sz="1800" b="1">
                 <a:solidFill>
                   <a:srgbClr val="263746"/>
                 </a:solidFill>
@@ -6878,71 +6390,10 @@
       </p:sp>
       <p:sp>
         <p:nvSpPr>
-          <p:cNvPr id="32" name="p12s8">
-            <a:extLst xmlns:a="http://schemas.openxmlformats.org/drawingml/2006/main">
-              <a:ext uri="{FF2B5EF4-FFF2-40B4-BE49-F238E27FC236}">
-                <a16:creationId xmlns:a16="http://schemas.microsoft.com/office/drawing/2014/main" id="{D5C1DD5B-E6A8-4EA9-8C82-965A0930D939}"/>
-              </a:ext>
-            </a:extLst>
-          </p:cNvPr>
-          <p:cNvSpPr>
-            <a:spLocks xmlns:a="http://schemas.openxmlformats.org/drawingml/2006/main" noGrp="1"/>
-          </p:cNvSpPr>
-          <p:nvPr/>
-        </p:nvSpPr>
-        <p:spPr>
-          <a:xfrm xmlns:a="http://schemas.openxmlformats.org/drawingml/2006/main">
-            <a:off x="10991850" y="3295650"/>
-            <a:ext cx="990600" cy="495300"/>
-          </a:xfrm>
-          <a:prstGeom xmlns:a="http://schemas.openxmlformats.org/drawingml/2006/main" prst="rect">
-            <a:avLst/>
-          </a:prstGeom>
-          <a:solidFill xmlns:a="http://schemas.openxmlformats.org/drawingml/2006/main">
-            <a:srgbClr val="FFFFFF"/>
-          </a:solidFill>
-          <a:ln xmlns:a="http://schemas.openxmlformats.org/drawingml/2006/main" w="9525">
-            <a:solidFill>
-              <a:srgbClr val="D6DDE2"/>
-            </a:solidFill>
-            <a:prstDash val="solid"/>
-          </a:ln>
-        </p:spPr>
-        <p:txBody>
-          <a:bodyPr xmlns:a="http://schemas.openxmlformats.org/drawingml/2006/main" lIns="76200" tIns="38100" rIns="76200" bIns="38100" anchor="ctr"/>
-          <a:lstStyle xmlns:a="http://schemas.openxmlformats.org/drawingml/2006/main"/>
-          <a:p xmlns:a="http://schemas.openxmlformats.org/drawingml/2006/main">
-            <a:pPr algn="ctr">
-              <a:lnSpc>
-                <a:spcPct val="110000"/>
-              </a:lnSpc>
-              <a:buNone/>
-              <a:defRPr sz="975" b="1">
-                <a:solidFill>
-                  <a:srgbClr val="667684"/>
-                </a:solidFill>
-              </a:defRPr>
-            </a:pPr>
-            <a:r>
-              <a:rPr sz="975" b="1">
-                <a:solidFill>
-                  <a:srgbClr val="667684"/>
-                </a:solidFill>
-                <a:latin typeface="Microsoft YaHei"/>
-                <a:ea typeface="Microsoft YaHei"/>
-                <a:cs typeface="Microsoft YaHei"/>
-              </a:rPr>
-              <a:t>□ 满足  □ 部分  □ 未覆盖</a:t>
-            </a:r>
-          </a:p>
-        </p:txBody>
-      </p:sp>
-      <p:sp>
-        <p:nvSpPr>
           <p:cNvPr id="33" name="p12n9">
             <a:extLst xmlns:a="http://schemas.openxmlformats.org/drawingml/2006/main">
               <a:ext uri="{FF2B5EF4-FFF2-40B4-BE49-F238E27FC236}">
-                <a16:creationId xmlns:a16="http://schemas.microsoft.com/office/drawing/2014/main" id="{1DCBEDC6-B9E3-43B7-A434-C5B8429521DD}"/>
+                <a16:creationId xmlns:a16="http://schemas.microsoft.com/office/drawing/2014/main" id="{77109952-F156-440F-A697-7957D02A4C3D}"/>
               </a:ext>
             </a:extLst>
           </p:cNvPr>
@@ -6954,7 +6405,7 @@
         <p:spPr>
           <a:xfrm xmlns:a="http://schemas.openxmlformats.org/drawingml/2006/main">
             <a:off x="6324600" y="4076700"/>
-            <a:ext cx="457200" cy="495300"/>
+            <a:ext cx="590550" cy="495300"/>
           </a:xfrm>
           <a:prstGeom xmlns:a="http://schemas.openxmlformats.org/drawingml/2006/main" prst="roundRect">
             <a:avLst>
@@ -6985,7 +6436,7 @@
               </a:defRPr>
             </a:pPr>
             <a:r>
-              <a:rPr sz="1275" b="1">
+              <a:rPr sz="1800" b="1">
                 <a:solidFill>
                   <a:srgbClr val="FFFFFF"/>
                 </a:solidFill>
@@ -7003,19 +6454,19 @@
           <p:cNvPr id="34" name="p12t9">
             <a:extLst xmlns:a="http://schemas.openxmlformats.org/drawingml/2006/main">
               <a:ext uri="{FF2B5EF4-FFF2-40B4-BE49-F238E27FC236}">
-                <a16:creationId xmlns:a16="http://schemas.microsoft.com/office/drawing/2014/main" id="{806FFC32-F896-4F72-8EB1-2C11539BE4CC}"/>
-              </a:ext>
-            </a:extLst>
-          </p:cNvPr>
-          <p:cNvSpPr>
-            <a:spLocks xmlns:a="http://schemas.openxmlformats.org/drawingml/2006/main" noGrp="1"/>
-          </p:cNvSpPr>
-          <p:nvPr/>
-        </p:nvSpPr>
-        <p:spPr>
-          <a:xfrm xmlns:a="http://schemas.openxmlformats.org/drawingml/2006/main">
-            <a:off x="6896100" y="4076700"/>
-            <a:ext cx="4000500" cy="495300"/>
+                <a16:creationId xmlns:a16="http://schemas.microsoft.com/office/drawing/2014/main" id="{BEA8179D-0CD6-4D24-BD57-E72299081422}"/>
+              </a:ext>
+            </a:extLst>
+          </p:cNvPr>
+          <p:cNvSpPr>
+            <a:spLocks xmlns:a="http://schemas.openxmlformats.org/drawingml/2006/main" noGrp="1"/>
+          </p:cNvSpPr>
+          <p:nvPr/>
+        </p:nvSpPr>
+        <p:spPr>
+          <a:xfrm xmlns:a="http://schemas.openxmlformats.org/drawingml/2006/main">
+            <a:off x="7029450" y="4076700"/>
+            <a:ext cx="4933950" cy="495300"/>
           </a:xfrm>
           <a:prstGeom xmlns:a="http://schemas.openxmlformats.org/drawingml/2006/main" prst="rect">
             <a:avLst/>
@@ -7044,7 +6495,7 @@
               </a:defRPr>
             </a:pPr>
             <a:r>
-              <a:rPr sz="1275" b="1">
+              <a:rPr sz="1800" b="1">
                 <a:solidFill>
                   <a:srgbClr val="263746"/>
                 </a:solidFill>
@@ -7059,33 +6510,31 @@
       </p:sp>
       <p:sp>
         <p:nvSpPr>
-          <p:cNvPr id="35" name="p12s9">
-            <a:extLst xmlns:a="http://schemas.openxmlformats.org/drawingml/2006/main">
-              <a:ext uri="{FF2B5EF4-FFF2-40B4-BE49-F238E27FC236}">
-                <a16:creationId xmlns:a16="http://schemas.microsoft.com/office/drawing/2014/main" id="{B57D53A6-3444-4F79-A641-AE22C5753FC5}"/>
-              </a:ext>
-            </a:extLst>
-          </p:cNvPr>
-          <p:cNvSpPr>
-            <a:spLocks xmlns:a="http://schemas.openxmlformats.org/drawingml/2006/main" noGrp="1"/>
-          </p:cNvSpPr>
-          <p:nvPr/>
-        </p:nvSpPr>
-        <p:spPr>
-          <a:xfrm xmlns:a="http://schemas.openxmlformats.org/drawingml/2006/main">
-            <a:off x="10991850" y="4076700"/>
-            <a:ext cx="990600" cy="495300"/>
+          <p:cNvPr id="36" name="p12c">
+            <a:extLst xmlns:a="http://schemas.openxmlformats.org/drawingml/2006/main">
+              <a:ext uri="{FF2B5EF4-FFF2-40B4-BE49-F238E27FC236}">
+                <a16:creationId xmlns:a16="http://schemas.microsoft.com/office/drawing/2014/main" id="{6EC65BD0-D900-4770-805A-6A0643EDFA56}"/>
+              </a:ext>
+            </a:extLst>
+          </p:cNvPr>
+          <p:cNvSpPr>
+            <a:spLocks xmlns:a="http://schemas.openxmlformats.org/drawingml/2006/main" noGrp="1"/>
+          </p:cNvSpPr>
+          <p:nvPr/>
+        </p:nvSpPr>
+        <p:spPr>
+          <a:xfrm xmlns:a="http://schemas.openxmlformats.org/drawingml/2006/main">
+            <a:off x="1428750" y="5029200"/>
+            <a:ext cx="9334500" cy="533400"/>
           </a:xfrm>
           <a:prstGeom xmlns:a="http://schemas.openxmlformats.org/drawingml/2006/main" prst="rect">
             <a:avLst/>
           </a:prstGeom>
           <a:solidFill xmlns:a="http://schemas.openxmlformats.org/drawingml/2006/main">
-            <a:srgbClr val="FFFFFF"/>
-          </a:solidFill>
-          <a:ln xmlns:a="http://schemas.openxmlformats.org/drawingml/2006/main" w="9525">
-            <a:solidFill>
-              <a:srgbClr val="D6DDE2"/>
-            </a:solidFill>
+            <a:srgbClr val="F8E9EA"/>
+          </a:solidFill>
+          <a:ln xmlns:a="http://schemas.openxmlformats.org/drawingml/2006/main" w="0">
+            <a:noFill/>
             <a:prstDash val="solid"/>
           </a:ln>
         </p:spPr>
@@ -7098,65 +6547,6 @@
                 <a:spcPct val="110000"/>
               </a:lnSpc>
               <a:buNone/>
-              <a:defRPr sz="975" b="1">
-                <a:solidFill>
-                  <a:srgbClr val="667684"/>
-                </a:solidFill>
-              </a:defRPr>
-            </a:pPr>
-            <a:r>
-              <a:rPr sz="975" b="1">
-                <a:solidFill>
-                  <a:srgbClr val="667684"/>
-                </a:solidFill>
-                <a:latin typeface="Microsoft YaHei"/>
-                <a:ea typeface="Microsoft YaHei"/>
-                <a:cs typeface="Microsoft YaHei"/>
-              </a:rPr>
-              <a:t>□ 满足  □ 部分  □ 未覆盖</a:t>
-            </a:r>
-          </a:p>
-        </p:txBody>
-      </p:sp>
-      <p:sp>
-        <p:nvSpPr>
-          <p:cNvPr id="36" name="p12c">
-            <a:extLst xmlns:a="http://schemas.openxmlformats.org/drawingml/2006/main">
-              <a:ext uri="{FF2B5EF4-FFF2-40B4-BE49-F238E27FC236}">
-                <a16:creationId xmlns:a16="http://schemas.microsoft.com/office/drawing/2014/main" id="{6974DADA-312A-48F3-85C5-CF7930256518}"/>
-              </a:ext>
-            </a:extLst>
-          </p:cNvPr>
-          <p:cNvSpPr>
-            <a:spLocks xmlns:a="http://schemas.openxmlformats.org/drawingml/2006/main" noGrp="1"/>
-          </p:cNvSpPr>
-          <p:nvPr/>
-        </p:nvSpPr>
-        <p:spPr>
-          <a:xfrm xmlns:a="http://schemas.openxmlformats.org/drawingml/2006/main">
-            <a:off x="1428750" y="5029200"/>
-            <a:ext cx="9334500" cy="533400"/>
-          </a:xfrm>
-          <a:prstGeom xmlns:a="http://schemas.openxmlformats.org/drawingml/2006/main" prst="rect">
-            <a:avLst/>
-          </a:prstGeom>
-          <a:solidFill xmlns:a="http://schemas.openxmlformats.org/drawingml/2006/main">
-            <a:srgbClr val="F8E9EA"/>
-          </a:solidFill>
-          <a:ln xmlns:a="http://schemas.openxmlformats.org/drawingml/2006/main" w="0">
-            <a:noFill/>
-            <a:prstDash val="solid"/>
-          </a:ln>
-        </p:spPr>
-        <p:txBody>
-          <a:bodyPr xmlns:a="http://schemas.openxmlformats.org/drawingml/2006/main" lIns="76200" tIns="38100" rIns="76200" bIns="38100" anchor="ctr"/>
-          <a:lstStyle xmlns:a="http://schemas.openxmlformats.org/drawingml/2006/main"/>
-          <a:p xmlns:a="http://schemas.openxmlformats.org/drawingml/2006/main">
-            <a:pPr algn="ctr">
-              <a:lnSpc>
-                <a:spcPct val="110000"/>
-              </a:lnSpc>
-              <a:buNone/>
               <a:defRPr sz="1650" b="1">
                 <a:solidFill>
                   <a:srgbClr val="C8161E"/>
@@ -7164,7 +6554,7 @@
               </a:defRPr>
             </a:pPr>
             <a:r>
-              <a:rPr sz="1650" b="1">
+              <a:rPr sz="1800" b="1">
                 <a:solidFill>
                   <a:srgbClr val="C8161E"/>
                 </a:solidFill>
@@ -7172,7 +6562,7 @@
                 <a:ea typeface="Microsoft YaHei"/>
                 <a:cs typeface="Microsoft YaHei"/>
               </a:rPr>
-              <a:t>这是形成性预检；第 16 课才进行正式门检查。</a:t>
+              <a:t>在 revision-plan.md 标注：满足 / 部分 / 未覆盖；第 16 课才正式检查。</a:t>
             </a:r>
           </a:p>
         </p:txBody>
@@ -7279,7 +6669,7 @@
           <p:cNvPr id="6" name="p13a0">
             <a:extLst xmlns:a="http://schemas.openxmlformats.org/drawingml/2006/main">
               <a:ext uri="{FF2B5EF4-FFF2-40B4-BE49-F238E27FC236}">
-                <a16:creationId xmlns:a16="http://schemas.microsoft.com/office/drawing/2014/main" id="{31520F62-C755-4B54-BDF8-B0AF76463ABE}"/>
+                <a16:creationId xmlns:a16="http://schemas.microsoft.com/office/drawing/2014/main" id="{0ACCED3C-B0D9-46E0-8B5E-AD0991299586}"/>
               </a:ext>
             </a:extLst>
           </p:cNvPr>
@@ -7340,7 +6730,7 @@
           <p:cNvPr id="7" name="p13b0">
             <a:extLst xmlns:a="http://schemas.openxmlformats.org/drawingml/2006/main">
               <a:ext uri="{FF2B5EF4-FFF2-40B4-BE49-F238E27FC236}">
-                <a16:creationId xmlns:a16="http://schemas.microsoft.com/office/drawing/2014/main" id="{7ECF5DC8-3DA8-402F-B4D8-CB45499123D1}"/>
+                <a16:creationId xmlns:a16="http://schemas.microsoft.com/office/drawing/2014/main" id="{911927D7-3D5D-4C8C-9890-6545BC83CC70}"/>
               </a:ext>
             </a:extLst>
           </p:cNvPr>
@@ -7399,7 +6789,7 @@
           <p:cNvPr id="8" name="p13a1">
             <a:extLst xmlns:a="http://schemas.openxmlformats.org/drawingml/2006/main">
               <a:ext uri="{FF2B5EF4-FFF2-40B4-BE49-F238E27FC236}">
-                <a16:creationId xmlns:a16="http://schemas.microsoft.com/office/drawing/2014/main" id="{DC1889EC-C20B-44F7-8912-6D50DB5963ED}"/>
+                <a16:creationId xmlns:a16="http://schemas.microsoft.com/office/drawing/2014/main" id="{9A2F9FF1-AB89-443F-80EC-E86255729706}"/>
               </a:ext>
             </a:extLst>
           </p:cNvPr>
@@ -7460,7 +6850,7 @@
           <p:cNvPr id="9" name="p13b1">
             <a:extLst xmlns:a="http://schemas.openxmlformats.org/drawingml/2006/main">
               <a:ext uri="{FF2B5EF4-FFF2-40B4-BE49-F238E27FC236}">
-                <a16:creationId xmlns:a16="http://schemas.microsoft.com/office/drawing/2014/main" id="{E5C1FA54-23A4-45C0-B9E6-D58ADE60A9E6}"/>
+                <a16:creationId xmlns:a16="http://schemas.microsoft.com/office/drawing/2014/main" id="{55A71454-96A0-429A-A3DD-C8CC34E4D81D}"/>
               </a:ext>
             </a:extLst>
           </p:cNvPr>
@@ -7519,7 +6909,7 @@
           <p:cNvPr id="10" name="p13a2">
             <a:extLst xmlns:a="http://schemas.openxmlformats.org/drawingml/2006/main">
               <a:ext uri="{FF2B5EF4-FFF2-40B4-BE49-F238E27FC236}">
-                <a16:creationId xmlns:a16="http://schemas.microsoft.com/office/drawing/2014/main" id="{D40381C7-89E3-4E4A-BBAF-2112EF6821E0}"/>
+                <a16:creationId xmlns:a16="http://schemas.microsoft.com/office/drawing/2014/main" id="{E5F33EFA-0265-4FE6-83A4-E491F86F540A}"/>
               </a:ext>
             </a:extLst>
           </p:cNvPr>
@@ -7580,7 +6970,7 @@
           <p:cNvPr id="11" name="p13b2">
             <a:extLst xmlns:a="http://schemas.openxmlformats.org/drawingml/2006/main">
               <a:ext uri="{FF2B5EF4-FFF2-40B4-BE49-F238E27FC236}">
-                <a16:creationId xmlns:a16="http://schemas.microsoft.com/office/drawing/2014/main" id="{36370901-EDCE-4211-A084-FF9FE18FB7DB}"/>
+                <a16:creationId xmlns:a16="http://schemas.microsoft.com/office/drawing/2014/main" id="{FB54A1CB-0794-46DA-A195-975F965B17F8}"/>
               </a:ext>
             </a:extLst>
           </p:cNvPr>
@@ -7639,7 +7029,7 @@
           <p:cNvPr id="12" name="p13mid">
             <a:extLst xmlns:a="http://schemas.openxmlformats.org/drawingml/2006/main">
               <a:ext uri="{FF2B5EF4-FFF2-40B4-BE49-F238E27FC236}">
-                <a16:creationId xmlns:a16="http://schemas.microsoft.com/office/drawing/2014/main" id="{76A2B145-FB6F-46B9-A2FB-CD6E50ACA187}"/>
+                <a16:creationId xmlns:a16="http://schemas.microsoft.com/office/drawing/2014/main" id="{C1E6FDC3-F436-4D8D-BF07-9B0F03608DC6}"/>
               </a:ext>
             </a:extLst>
           </p:cNvPr>
@@ -7670,7 +7060,7 @@
           <p:cNvPr id="13" name="p13right">
             <a:extLst xmlns:a="http://schemas.openxmlformats.org/drawingml/2006/main">
               <a:ext uri="{FF2B5EF4-FFF2-40B4-BE49-F238E27FC236}">
-                <a16:creationId xmlns:a16="http://schemas.microsoft.com/office/drawing/2014/main" id="{C538441A-70D8-4FBF-A9B5-8398650CFB18}"/>
+                <a16:creationId xmlns:a16="http://schemas.microsoft.com/office/drawing/2014/main" id="{FE29B9BD-9F98-4F85-B8F3-7CDAEDAB579B}"/>
               </a:ext>
             </a:extLst>
           </p:cNvPr>
@@ -7856,7 +7246,7 @@
           <p:cNvPr id="14" name="p13c">
             <a:extLst xmlns:a="http://schemas.openxmlformats.org/drawingml/2006/main">
               <a:ext uri="{FF2B5EF4-FFF2-40B4-BE49-F238E27FC236}">
-                <a16:creationId xmlns:a16="http://schemas.microsoft.com/office/drawing/2014/main" id="{AD2A0BA9-F00E-4E85-9C17-25441682CB91}"/>
+                <a16:creationId xmlns:a16="http://schemas.microsoft.com/office/drawing/2014/main" id="{803C4B33-759F-4E71-B570-BBAAE43C6CC8}"/>
               </a:ext>
             </a:extLst>
           </p:cNvPr>
@@ -8012,7 +7402,7 @@
           <p:cNvPr id="6" name="lab">
             <a:extLst xmlns:a="http://schemas.openxmlformats.org/drawingml/2006/main">
               <a:ext uri="{FF2B5EF4-FFF2-40B4-BE49-F238E27FC236}">
-                <a16:creationId xmlns:a16="http://schemas.microsoft.com/office/drawing/2014/main" id="{35C69D92-4AF3-4506-A4F2-3C1DF5D921FB}"/>
+                <a16:creationId xmlns:a16="http://schemas.microsoft.com/office/drawing/2014/main" id="{A82CDC4D-8BD0-4EE1-BA66-C5C6042E89A7}"/>
               </a:ext>
             </a:extLst>
           </p:cNvPr>
@@ -8069,7 +7459,7 @@
           <p:cNvPr id="7" name="p140a">
             <a:extLst xmlns:a="http://schemas.openxmlformats.org/drawingml/2006/main">
               <a:ext uri="{FF2B5EF4-FFF2-40B4-BE49-F238E27FC236}">
-                <a16:creationId xmlns:a16="http://schemas.microsoft.com/office/drawing/2014/main" id="{A356B163-70FC-4724-A656-81044A30B2FC}"/>
+                <a16:creationId xmlns:a16="http://schemas.microsoft.com/office/drawing/2014/main" id="{A76B09FB-426D-4FFE-9C57-5739A40507A1}"/>
               </a:ext>
             </a:extLst>
           </p:cNvPr>
@@ -8130,7 +7520,7 @@
           <p:cNvPr id="8" name="p140b">
             <a:extLst xmlns:a="http://schemas.openxmlformats.org/drawingml/2006/main">
               <a:ext uri="{FF2B5EF4-FFF2-40B4-BE49-F238E27FC236}">
-                <a16:creationId xmlns:a16="http://schemas.microsoft.com/office/drawing/2014/main" id="{C9DD963C-4F8E-45B7-8195-883AC00B4046}"/>
+                <a16:creationId xmlns:a16="http://schemas.microsoft.com/office/drawing/2014/main" id="{D4C99E43-5D93-4EB7-AA41-7DF3D8FBABA5}"/>
               </a:ext>
             </a:extLst>
           </p:cNvPr>
@@ -8179,7 +7569,7 @@
                 <a:ea typeface="Microsoft YaHei"/>
                 <a:cs typeface="Microsoft YaHei"/>
               </a:rPr>
-              <a:t>评 1 位固定同伴  →  peer-review-log.md</a:t>
+              <a:t>评 1 位同伴 + 三问  →  peer-review.md</a:t>
             </a:r>
           </a:p>
         </p:txBody>
@@ -8189,7 +7579,7 @@
           <p:cNvPr id="9" name="p141a">
             <a:extLst xmlns:a="http://schemas.openxmlformats.org/drawingml/2006/main">
               <a:ext uri="{FF2B5EF4-FFF2-40B4-BE49-F238E27FC236}">
-                <a16:creationId xmlns:a16="http://schemas.microsoft.com/office/drawing/2014/main" id="{7BD410D6-1764-410F-999D-E8B80F190FCA}"/>
+                <a16:creationId xmlns:a16="http://schemas.microsoft.com/office/drawing/2014/main" id="{DDDA4BEB-8874-4DA4-BA7E-473152CCB5F5}"/>
               </a:ext>
             </a:extLst>
           </p:cNvPr>
@@ -8250,7 +7640,7 @@
           <p:cNvPr id="10" name="p141b">
             <a:extLst xmlns:a="http://schemas.openxmlformats.org/drawingml/2006/main">
               <a:ext uri="{FF2B5EF4-FFF2-40B4-BE49-F238E27FC236}">
-                <a16:creationId xmlns:a16="http://schemas.microsoft.com/office/drawing/2014/main" id="{0B835427-402E-4C6C-8A8B-FB4B7DE5C1CF}"/>
+                <a16:creationId xmlns:a16="http://schemas.microsoft.com/office/drawing/2014/main" id="{FF86E8E0-5713-4F7B-9553-C4F41ECB65E4}"/>
               </a:ext>
             </a:extLst>
           </p:cNvPr>
@@ -8299,7 +7689,7 @@
                 <a:ea typeface="Microsoft YaHei"/>
                 <a:cs typeface="Microsoft YaHei"/>
               </a:rPr>
-              <a:t>写 ≥2 条回应  →  response-log.md</a:t>
+              <a:t>写 ≥2 条作者回应  →  peer-review.md</a:t>
             </a:r>
           </a:p>
         </p:txBody>
@@ -8309,7 +7699,7 @@
           <p:cNvPr id="11" name="p142a">
             <a:extLst xmlns:a="http://schemas.openxmlformats.org/drawingml/2006/main">
               <a:ext uri="{FF2B5EF4-FFF2-40B4-BE49-F238E27FC236}">
-                <a16:creationId xmlns:a16="http://schemas.microsoft.com/office/drawing/2014/main" id="{4EA47A2D-CFB4-40C6-94D2-3FA2F25994F6}"/>
+                <a16:creationId xmlns:a16="http://schemas.microsoft.com/office/drawing/2014/main" id="{C939D0F2-7961-4E48-99B6-219755D26909}"/>
               </a:ext>
             </a:extLst>
           </p:cNvPr>
@@ -8370,7 +7760,7 @@
           <p:cNvPr id="12" name="p142b">
             <a:extLst xmlns:a="http://schemas.openxmlformats.org/drawingml/2006/main">
               <a:ext uri="{FF2B5EF4-FFF2-40B4-BE49-F238E27FC236}">
-                <a16:creationId xmlns:a16="http://schemas.microsoft.com/office/drawing/2014/main" id="{D0453F1F-4328-4A48-BE65-5FEF2D1D5DCB}"/>
+                <a16:creationId xmlns:a16="http://schemas.microsoft.com/office/drawing/2014/main" id="{344CE81C-0C30-4658-93A5-C0BD08C509E5}"/>
               </a:ext>
             </a:extLst>
           </p:cNvPr>
@@ -8419,7 +7809,7 @@
                 <a:ea typeface="Microsoft YaHei"/>
                 <a:cs typeface="Microsoft YaHei"/>
               </a:rPr>
-              <a:t>十项预检  →  notes/argument-gate.md</a:t>
+              <a:t>十项预检  →  revision-plan.md</a:t>
             </a:r>
           </a:p>
         </p:txBody>
@@ -8429,7 +7819,7 @@
           <p:cNvPr id="13" name="p143a">
             <a:extLst xmlns:a="http://schemas.openxmlformats.org/drawingml/2006/main">
               <a:ext uri="{FF2B5EF4-FFF2-40B4-BE49-F238E27FC236}">
-                <a16:creationId xmlns:a16="http://schemas.microsoft.com/office/drawing/2014/main" id="{333F3583-1902-44EA-AA0E-55341F83D152}"/>
+                <a16:creationId xmlns:a16="http://schemas.microsoft.com/office/drawing/2014/main" id="{EC7D8E39-85C7-438B-AC94-8B1B34B613A1}"/>
               </a:ext>
             </a:extLst>
           </p:cNvPr>
@@ -8490,7 +7880,7 @@
           <p:cNvPr id="14" name="p143b">
             <a:extLst xmlns:a="http://schemas.openxmlformats.org/drawingml/2006/main">
               <a:ext uri="{FF2B5EF4-FFF2-40B4-BE49-F238E27FC236}">
-                <a16:creationId xmlns:a16="http://schemas.microsoft.com/office/drawing/2014/main" id="{929D659E-787F-4889-A59F-A15491C0485F}"/>
+                <a16:creationId xmlns:a16="http://schemas.microsoft.com/office/drawing/2014/main" id="{29342215-2872-4C1A-B9A6-84F5837352B1}"/>
               </a:ext>
             </a:extLst>
           </p:cNvPr>
@@ -8539,7 +7929,7 @@
                 <a:ea typeface="Microsoft YaHei"/>
                 <a:cs typeface="Microsoft YaHei"/>
               </a:rPr>
-              <a:t>排致命/重要/表达  →  revision-priority.md</a:t>
+              <a:t>致命 / 重要 / 表达  →  revision-plan.md</a:t>
             </a:r>
           </a:p>
         </p:txBody>
@@ -8549,7 +7939,7 @@
           <p:cNvPr id="15" name="p14c">
             <a:extLst xmlns:a="http://schemas.openxmlformats.org/drawingml/2006/main">
               <a:ext uri="{FF2B5EF4-FFF2-40B4-BE49-F238E27FC236}">
-                <a16:creationId xmlns:a16="http://schemas.microsoft.com/office/drawing/2014/main" id="{504F16E3-2E78-4D19-8C13-474866BF54E9}"/>
+                <a16:creationId xmlns:a16="http://schemas.microsoft.com/office/drawing/2014/main" id="{649BB41F-B809-4C74-B52B-89FC9E456327}"/>
               </a:ext>
             </a:extLst>
           </p:cNvPr>
@@ -8705,34 +8095,36 @@
           <p:cNvPr id="6" name="lab">
             <a:extLst xmlns:a="http://schemas.openxmlformats.org/drawingml/2006/main">
               <a:ext uri="{FF2B5EF4-FFF2-40B4-BE49-F238E27FC236}">
-                <a16:creationId xmlns:a16="http://schemas.microsoft.com/office/drawing/2014/main" id="{314EBDAD-FBC2-4A83-99C0-704B01BE6119}"/>
-              </a:ext>
-            </a:extLst>
-          </p:cNvPr>
-          <p:cNvSpPr>
-            <a:spLocks xmlns:a="http://schemas.openxmlformats.org/drawingml/2006/main" noGrp="1"/>
-          </p:cNvSpPr>
-          <p:nvPr/>
-        </p:nvSpPr>
-        <p:spPr>
-          <a:xfrm xmlns:a="http://schemas.openxmlformats.org/drawingml/2006/main">
-            <a:off x="8610600" y="838200"/>
-            <a:ext cx="2952750" cy="304800"/>
+                <a16:creationId xmlns:a16="http://schemas.microsoft.com/office/drawing/2014/main" id="{B8EEC58D-791B-41F3-9165-DF5D65A397FE}"/>
+              </a:ext>
+            </a:extLst>
+          </p:cNvPr>
+          <p:cNvSpPr>
+            <a:spLocks xmlns:a="http://schemas.openxmlformats.org/drawingml/2006/main" noGrp="1"/>
+          </p:cNvSpPr>
+          <p:nvPr/>
+        </p:nvSpPr>
+        <p:spPr>
+          <a:xfrm xmlns:a="http://schemas.openxmlformats.org/drawingml/2006/main">
+            <a:off x="6953250" y="781050"/>
+            <a:ext cx="4610100" cy="438150"/>
           </a:xfrm>
           <a:prstGeom xmlns:a="http://schemas.openxmlformats.org/drawingml/2006/main" prst="rect">
             <a:avLst/>
           </a:prstGeom>
-          <a:noFill xmlns:a="http://schemas.openxmlformats.org/drawingml/2006/main"/>
-          <a:ln xmlns:a="http://schemas.openxmlformats.org/drawingml/2006/main" w="0">
-            <a:noFill/>
-            <a:prstDash val="solid"/>
-          </a:ln>
-        </p:spPr>
-        <p:txBody>
-          <a:bodyPr xmlns:a="http://schemas.openxmlformats.org/drawingml/2006/main" lIns="76200" tIns="38100" rIns="76200" bIns="38100" anchor="ctr"/>
-          <a:lstStyle xmlns:a="http://schemas.openxmlformats.org/drawingml/2006/main"/>
-          <a:p xmlns:a="http://schemas.openxmlformats.org/drawingml/2006/main">
-            <a:pPr algn="r">
+          <a:solidFill xmlns:a="http://schemas.openxmlformats.org/drawingml/2006/main">
+            <a:srgbClr val="F8E9EA"/>
+          </a:solidFill>
+          <a:ln xmlns:a="http://schemas.openxmlformats.org/drawingml/2006/main" w="0">
+            <a:noFill/>
+            <a:prstDash val="solid"/>
+          </a:ln>
+        </p:spPr>
+        <p:txBody>
+          <a:bodyPr xmlns:a="http://schemas.openxmlformats.org/drawingml/2006/main" lIns="76200" tIns="38100" rIns="76200" bIns="38100" anchor="ctr"/>
+          <a:lstStyle xmlns:a="http://schemas.openxmlformats.org/drawingml/2006/main"/>
+          <a:p xmlns:a="http://schemas.openxmlformats.org/drawingml/2006/main">
+            <a:pPr algn="ctr">
               <a:lnSpc>
                 <a:spcPct val="110000"/>
               </a:lnSpc>
@@ -8744,7 +8136,7 @@
               </a:defRPr>
             </a:pPr>
             <a:r>
-              <a:rPr sz="1125" b="1">
+              <a:rPr sz="1800" b="1">
                 <a:solidFill>
                   <a:srgbClr val="C8161E"/>
                 </a:solidFill>
@@ -8752,7 +8144,7 @@
                 <a:ea typeface="Microsoft YaHei"/>
                 <a:cs typeface="Microsoft YaHei"/>
               </a:rPr>
-              <a:t>教师构造反例｜非真实评审</a:t>
+              <a:t>教师构造虚构评审｜非真实意见</a:t>
             </a:r>
           </a:p>
         </p:txBody>
@@ -8762,7 +8154,7 @@
           <p:cNvPr id="7" name="bad">
             <a:extLst xmlns:a="http://schemas.openxmlformats.org/drawingml/2006/main">
               <a:ext uri="{FF2B5EF4-FFF2-40B4-BE49-F238E27FC236}">
-                <a16:creationId xmlns:a16="http://schemas.microsoft.com/office/drawing/2014/main" id="{96168B76-E149-42F2-90CD-C25D5C9A92B2}"/>
+                <a16:creationId xmlns:a16="http://schemas.microsoft.com/office/drawing/2014/main" id="{83626EEC-6836-4BFD-88C0-5085FA7D7179}"/>
               </a:ext>
             </a:extLst>
           </p:cNvPr>
@@ -8823,7 +8215,7 @@
           <p:cNvPr id="8" name="arr">
             <a:extLst xmlns:a="http://schemas.openxmlformats.org/drawingml/2006/main">
               <a:ext uri="{FF2B5EF4-FFF2-40B4-BE49-F238E27FC236}">
-                <a16:creationId xmlns:a16="http://schemas.microsoft.com/office/drawing/2014/main" id="{94A5934C-2AD5-44EB-89B7-68503DBFB2BF}"/>
+                <a16:creationId xmlns:a16="http://schemas.microsoft.com/office/drawing/2014/main" id="{4C06E76E-3846-4E23-8D40-0916348B6F16}"/>
               </a:ext>
             </a:extLst>
           </p:cNvPr>
@@ -8880,7 +8272,7 @@
           <p:cNvPr id="9" name="good">
             <a:extLst xmlns:a="http://schemas.openxmlformats.org/drawingml/2006/main">
               <a:ext uri="{FF2B5EF4-FFF2-40B4-BE49-F238E27FC236}">
-                <a16:creationId xmlns:a16="http://schemas.microsoft.com/office/drawing/2014/main" id="{6D27F73E-2F09-4890-A792-BEC0064D77D4}"/>
+                <a16:creationId xmlns:a16="http://schemas.microsoft.com/office/drawing/2014/main" id="{F005DB25-C8E9-4C1E-8A89-79E2AF10B6ED}"/>
               </a:ext>
             </a:extLst>
           </p:cNvPr>
@@ -8941,7 +8333,7 @@
           <p:cNvPr id="10" name="p150">
             <a:extLst xmlns:a="http://schemas.openxmlformats.org/drawingml/2006/main">
               <a:ext uri="{FF2B5EF4-FFF2-40B4-BE49-F238E27FC236}">
-                <a16:creationId xmlns:a16="http://schemas.microsoft.com/office/drawing/2014/main" id="{7020D210-5579-4449-9E7B-05B05FC7D5DB}"/>
+                <a16:creationId xmlns:a16="http://schemas.microsoft.com/office/drawing/2014/main" id="{E9C6E02D-4537-4B8E-9D1F-7DFDD1F294C8}"/>
               </a:ext>
             </a:extLst>
           </p:cNvPr>
@@ -9002,7 +8394,7 @@
           <p:cNvPr id="11" name="p151">
             <a:extLst xmlns:a="http://schemas.openxmlformats.org/drawingml/2006/main">
               <a:ext uri="{FF2B5EF4-FFF2-40B4-BE49-F238E27FC236}">
-                <a16:creationId xmlns:a16="http://schemas.microsoft.com/office/drawing/2014/main" id="{A207AF31-2958-4F22-8B63-A0D9CCC0A872}"/>
+                <a16:creationId xmlns:a16="http://schemas.microsoft.com/office/drawing/2014/main" id="{05673596-56B6-4686-BB69-2A978E4BF1FA}"/>
               </a:ext>
             </a:extLst>
           </p:cNvPr>
@@ -9063,7 +8455,7 @@
           <p:cNvPr id="12" name="p152">
             <a:extLst xmlns:a="http://schemas.openxmlformats.org/drawingml/2006/main">
               <a:ext uri="{FF2B5EF4-FFF2-40B4-BE49-F238E27FC236}">
-                <a16:creationId xmlns:a16="http://schemas.microsoft.com/office/drawing/2014/main" id="{78F5D01F-F582-46D4-935F-E8B2EF882518}"/>
+                <a16:creationId xmlns:a16="http://schemas.microsoft.com/office/drawing/2014/main" id="{F5199848-DF72-4373-9D63-BFF4DD3B8EF9}"/>
               </a:ext>
             </a:extLst>
           </p:cNvPr>
@@ -9124,7 +8516,7 @@
           <p:cNvPr id="13" name="p153">
             <a:extLst xmlns:a="http://schemas.openxmlformats.org/drawingml/2006/main">
               <a:ext uri="{FF2B5EF4-FFF2-40B4-BE49-F238E27FC236}">
-                <a16:creationId xmlns:a16="http://schemas.microsoft.com/office/drawing/2014/main" id="{2A5BC915-F47E-40EA-B78E-3AE334D17EE4}"/>
+                <a16:creationId xmlns:a16="http://schemas.microsoft.com/office/drawing/2014/main" id="{6B9662F0-F335-4269-8E8E-B92F5CC32B8B}"/>
               </a:ext>
             </a:extLst>
           </p:cNvPr>
@@ -9185,7 +8577,7 @@
           <p:cNvPr id="14" name="p15c">
             <a:extLst xmlns:a="http://schemas.openxmlformats.org/drawingml/2006/main">
               <a:ext uri="{FF2B5EF4-FFF2-40B4-BE49-F238E27FC236}">
-                <a16:creationId xmlns:a16="http://schemas.microsoft.com/office/drawing/2014/main" id="{49E46225-9B7A-49BE-9A76-0119E5A608D7}"/>
+                <a16:creationId xmlns:a16="http://schemas.microsoft.com/office/drawing/2014/main" id="{7497CE18-3517-47A7-BB22-9BB76D1B277D}"/>
               </a:ext>
             </a:extLst>
           </p:cNvPr>
@@ -9341,7 +8733,7 @@
           <p:cNvPr id="6" name="lab">
             <a:extLst xmlns:a="http://schemas.openxmlformats.org/drawingml/2006/main">
               <a:ext uri="{FF2B5EF4-FFF2-40B4-BE49-F238E27FC236}">
-                <a16:creationId xmlns:a16="http://schemas.microsoft.com/office/drawing/2014/main" id="{9DF75D07-E65C-4826-9683-A4B663CACE37}"/>
+                <a16:creationId xmlns:a16="http://schemas.microsoft.com/office/drawing/2014/main" id="{7678D2AF-8507-4E67-AB56-21C2EB89468A}"/>
               </a:ext>
             </a:extLst>
           </p:cNvPr>
@@ -9398,7 +8790,7 @@
           <p:cNvPr id="7" name="p160a">
             <a:extLst xmlns:a="http://schemas.openxmlformats.org/drawingml/2006/main">
               <a:ext uri="{FF2B5EF4-FFF2-40B4-BE49-F238E27FC236}">
-                <a16:creationId xmlns:a16="http://schemas.microsoft.com/office/drawing/2014/main" id="{731333FF-D877-457E-AA12-40BD31B32562}"/>
+                <a16:creationId xmlns:a16="http://schemas.microsoft.com/office/drawing/2014/main" id="{67987DE8-2BB7-41EA-BF75-15B9A0B803C8}"/>
               </a:ext>
             </a:extLst>
           </p:cNvPr>
@@ -9459,7 +8851,7 @@
           <p:cNvPr id="8" name="p160b">
             <a:extLst xmlns:a="http://schemas.openxmlformats.org/drawingml/2006/main">
               <a:ext uri="{FF2B5EF4-FFF2-40B4-BE49-F238E27FC236}">
-                <a16:creationId xmlns:a16="http://schemas.microsoft.com/office/drawing/2014/main" id="{AFC38B01-73C0-4011-A686-2AC4A9E6982D}"/>
+                <a16:creationId xmlns:a16="http://schemas.microsoft.com/office/drawing/2014/main" id="{1C8503BD-1E45-483A-9CC5-494C856CAFF4}"/>
               </a:ext>
             </a:extLst>
           </p:cNvPr>
@@ -9518,7 +8910,7 @@
           <p:cNvPr id="9" name="p161a">
             <a:extLst xmlns:a="http://schemas.openxmlformats.org/drawingml/2006/main">
               <a:ext uri="{FF2B5EF4-FFF2-40B4-BE49-F238E27FC236}">
-                <a16:creationId xmlns:a16="http://schemas.microsoft.com/office/drawing/2014/main" id="{5968AFC7-4F04-4A59-9486-F0D885EC43D0}"/>
+                <a16:creationId xmlns:a16="http://schemas.microsoft.com/office/drawing/2014/main" id="{A4D9BACF-EF6C-4221-9122-1988A56A8D2C}"/>
               </a:ext>
             </a:extLst>
           </p:cNvPr>
@@ -9579,7 +8971,7 @@
           <p:cNvPr id="10" name="p161b">
             <a:extLst xmlns:a="http://schemas.openxmlformats.org/drawingml/2006/main">
               <a:ext uri="{FF2B5EF4-FFF2-40B4-BE49-F238E27FC236}">
-                <a16:creationId xmlns:a16="http://schemas.microsoft.com/office/drawing/2014/main" id="{5ECB4697-EB34-4F6C-9200-1052B12A77CE}"/>
+                <a16:creationId xmlns:a16="http://schemas.microsoft.com/office/drawing/2014/main" id="{F822A8AF-3EFF-4E4E-9C51-2C08524AF340}"/>
               </a:ext>
             </a:extLst>
           </p:cNvPr>
@@ -9638,7 +9030,7 @@
           <p:cNvPr id="11" name="p162a">
             <a:extLst xmlns:a="http://schemas.openxmlformats.org/drawingml/2006/main">
               <a:ext uri="{FF2B5EF4-FFF2-40B4-BE49-F238E27FC236}">
-                <a16:creationId xmlns:a16="http://schemas.microsoft.com/office/drawing/2014/main" id="{C2E9BAA7-1555-4C98-9D9B-D080BFF1CAB0}"/>
+                <a16:creationId xmlns:a16="http://schemas.microsoft.com/office/drawing/2014/main" id="{FEAE3B61-06BC-4B72-A75B-98BD33491C9A}"/>
               </a:ext>
             </a:extLst>
           </p:cNvPr>
@@ -9699,7 +9091,7 @@
           <p:cNvPr id="12" name="p162b">
             <a:extLst xmlns:a="http://schemas.openxmlformats.org/drawingml/2006/main">
               <a:ext uri="{FF2B5EF4-FFF2-40B4-BE49-F238E27FC236}">
-                <a16:creationId xmlns:a16="http://schemas.microsoft.com/office/drawing/2014/main" id="{E81BCFA0-5BD6-49B7-B81C-8AF4148D4882}"/>
+                <a16:creationId xmlns:a16="http://schemas.microsoft.com/office/drawing/2014/main" id="{7801144C-6A41-405F-8135-1688D8FF5226}"/>
               </a:ext>
             </a:extLst>
           </p:cNvPr>
@@ -9758,7 +9150,7 @@
           <p:cNvPr id="13" name="p16c">
             <a:extLst xmlns:a="http://schemas.openxmlformats.org/drawingml/2006/main">
               <a:ext uri="{FF2B5EF4-FFF2-40B4-BE49-F238E27FC236}">
-                <a16:creationId xmlns:a16="http://schemas.microsoft.com/office/drawing/2014/main" id="{3E750AEF-324F-4EA5-A58C-B453B2837F5C}"/>
+                <a16:creationId xmlns:a16="http://schemas.microsoft.com/office/drawing/2014/main" id="{7F395A4B-B09C-4166-8CFF-E322517D7695}"/>
               </a:ext>
             </a:extLst>
           </p:cNvPr>
@@ -9914,7 +9306,7 @@
           <p:cNvPr id="6" name="draft">
             <a:extLst xmlns:a="http://schemas.openxmlformats.org/drawingml/2006/main">
               <a:ext uri="{FF2B5EF4-FFF2-40B4-BE49-F238E27FC236}">
-                <a16:creationId xmlns:a16="http://schemas.microsoft.com/office/drawing/2014/main" id="{5B1DE15B-1C6E-4B2D-8BBE-45B84A1151B7}"/>
+                <a16:creationId xmlns:a16="http://schemas.microsoft.com/office/drawing/2014/main" id="{A7D071D9-5F15-4818-B03C-4DA00FEA7A21}"/>
               </a:ext>
             </a:extLst>
           </p:cNvPr>
@@ -9999,7 +9391,7 @@
           <p:cNvPr id="7" name="neq">
             <a:extLst xmlns:a="http://schemas.openxmlformats.org/drawingml/2006/main">
               <a:ext uri="{FF2B5EF4-FFF2-40B4-BE49-F238E27FC236}">
-                <a16:creationId xmlns:a16="http://schemas.microsoft.com/office/drawing/2014/main" id="{4351B605-875B-4787-923A-BF6972A08410}"/>
+                <a16:creationId xmlns:a16="http://schemas.microsoft.com/office/drawing/2014/main" id="{D5F8BBE5-C72A-4AA0-85CB-3E7F7C609D39}"/>
               </a:ext>
             </a:extLst>
           </p:cNvPr>
@@ -10056,7 +9448,7 @@
           <p:cNvPr id="8" name="p20a">
             <a:extLst xmlns:a="http://schemas.openxmlformats.org/drawingml/2006/main">
               <a:ext uri="{FF2B5EF4-FFF2-40B4-BE49-F238E27FC236}">
-                <a16:creationId xmlns:a16="http://schemas.microsoft.com/office/drawing/2014/main" id="{F579A7F0-7C0E-45E1-95E2-7E33D6EE0D49}"/>
+                <a16:creationId xmlns:a16="http://schemas.microsoft.com/office/drawing/2014/main" id="{D0E6A008-A7E4-4EFA-9DD7-5C548F99F1C7}"/>
               </a:ext>
             </a:extLst>
           </p:cNvPr>
@@ -10117,7 +9509,7 @@
           <p:cNvPr id="9" name="p20b">
             <a:extLst xmlns:a="http://schemas.openxmlformats.org/drawingml/2006/main">
               <a:ext uri="{FF2B5EF4-FFF2-40B4-BE49-F238E27FC236}">
-                <a16:creationId xmlns:a16="http://schemas.microsoft.com/office/drawing/2014/main" id="{0CB88B4C-A8BF-4395-9A81-5C8ECA07B1B7}"/>
+                <a16:creationId xmlns:a16="http://schemas.microsoft.com/office/drawing/2014/main" id="{1EB603C8-0D90-4B2F-9DAC-DF8FA1C8C62C}"/>
               </a:ext>
             </a:extLst>
           </p:cNvPr>
@@ -10176,7 +9568,7 @@
           <p:cNvPr id="10" name="p21a">
             <a:extLst xmlns:a="http://schemas.openxmlformats.org/drawingml/2006/main">
               <a:ext uri="{FF2B5EF4-FFF2-40B4-BE49-F238E27FC236}">
-                <a16:creationId xmlns:a16="http://schemas.microsoft.com/office/drawing/2014/main" id="{D3AB17F7-F4E5-4DD9-A6FA-7B5694B35292}"/>
+                <a16:creationId xmlns:a16="http://schemas.microsoft.com/office/drawing/2014/main" id="{141C9D46-6B6C-4C51-A1E2-E32DAFF3ED1D}"/>
               </a:ext>
             </a:extLst>
           </p:cNvPr>
@@ -10237,7 +9629,7 @@
           <p:cNvPr id="11" name="p21b">
             <a:extLst xmlns:a="http://schemas.openxmlformats.org/drawingml/2006/main">
               <a:ext uri="{FF2B5EF4-FFF2-40B4-BE49-F238E27FC236}">
-                <a16:creationId xmlns:a16="http://schemas.microsoft.com/office/drawing/2014/main" id="{142F90EB-F6F6-44C7-8582-95A7655C3F22}"/>
+                <a16:creationId xmlns:a16="http://schemas.microsoft.com/office/drawing/2014/main" id="{9FF662DD-151C-4FC1-8986-A2170B1BF821}"/>
               </a:ext>
             </a:extLst>
           </p:cNvPr>
@@ -10296,7 +9688,7 @@
           <p:cNvPr id="12" name="p22a">
             <a:extLst xmlns:a="http://schemas.openxmlformats.org/drawingml/2006/main">
               <a:ext uri="{FF2B5EF4-FFF2-40B4-BE49-F238E27FC236}">
-                <a16:creationId xmlns:a16="http://schemas.microsoft.com/office/drawing/2014/main" id="{9EFBC611-E5A4-4051-96A4-39EA5AE994F0}"/>
+                <a16:creationId xmlns:a16="http://schemas.microsoft.com/office/drawing/2014/main" id="{F8E27A78-889D-4DFE-BA00-8431BC9CD1FB}"/>
               </a:ext>
             </a:extLst>
           </p:cNvPr>
@@ -10357,7 +9749,7 @@
           <p:cNvPr id="13" name="p22b">
             <a:extLst xmlns:a="http://schemas.openxmlformats.org/drawingml/2006/main">
               <a:ext uri="{FF2B5EF4-FFF2-40B4-BE49-F238E27FC236}">
-                <a16:creationId xmlns:a16="http://schemas.microsoft.com/office/drawing/2014/main" id="{D41CDAAD-DC95-41CE-84A5-6D089E837F17}"/>
+                <a16:creationId xmlns:a16="http://schemas.microsoft.com/office/drawing/2014/main" id="{943E2735-BBB3-4041-AA34-2AC7ED2E0BE2}"/>
               </a:ext>
             </a:extLst>
           </p:cNvPr>
@@ -10416,7 +9808,7 @@
           <p:cNvPr id="14" name="p23a">
             <a:extLst xmlns:a="http://schemas.openxmlformats.org/drawingml/2006/main">
               <a:ext uri="{FF2B5EF4-FFF2-40B4-BE49-F238E27FC236}">
-                <a16:creationId xmlns:a16="http://schemas.microsoft.com/office/drawing/2014/main" id="{21D7D9D8-DF87-41B7-BF37-7651912500B7}"/>
+                <a16:creationId xmlns:a16="http://schemas.microsoft.com/office/drawing/2014/main" id="{F62CFFD2-06E0-462E-AC97-D68E0AC7E06F}"/>
               </a:ext>
             </a:extLst>
           </p:cNvPr>
@@ -10477,7 +9869,7 @@
           <p:cNvPr id="15" name="p23b">
             <a:extLst xmlns:a="http://schemas.openxmlformats.org/drawingml/2006/main">
               <a:ext uri="{FF2B5EF4-FFF2-40B4-BE49-F238E27FC236}">
-                <a16:creationId xmlns:a16="http://schemas.microsoft.com/office/drawing/2014/main" id="{6804FA99-B48B-4EA7-B75D-6F4EC8E55AD8}"/>
+                <a16:creationId xmlns:a16="http://schemas.microsoft.com/office/drawing/2014/main" id="{8F455382-567F-4958-9AD1-F2613B3A6287}"/>
               </a:ext>
             </a:extLst>
           </p:cNvPr>
@@ -10536,7 +9928,7 @@
           <p:cNvPr id="16" name="p24a">
             <a:extLst xmlns:a="http://schemas.openxmlformats.org/drawingml/2006/main">
               <a:ext uri="{FF2B5EF4-FFF2-40B4-BE49-F238E27FC236}">
-                <a16:creationId xmlns:a16="http://schemas.microsoft.com/office/drawing/2014/main" id="{B57D1127-8023-42B6-8DC0-7D9D6872B5E0}"/>
+                <a16:creationId xmlns:a16="http://schemas.microsoft.com/office/drawing/2014/main" id="{2C04949A-851A-4C36-ACE5-41D69227573C}"/>
               </a:ext>
             </a:extLst>
           </p:cNvPr>
@@ -10597,7 +9989,7 @@
           <p:cNvPr id="17" name="p24b">
             <a:extLst xmlns:a="http://schemas.openxmlformats.org/drawingml/2006/main">
               <a:ext uri="{FF2B5EF4-FFF2-40B4-BE49-F238E27FC236}">
-                <a16:creationId xmlns:a16="http://schemas.microsoft.com/office/drawing/2014/main" id="{3D88A53F-2452-40FD-AEDF-20B48B6B8F1C}"/>
+                <a16:creationId xmlns:a16="http://schemas.microsoft.com/office/drawing/2014/main" id="{2420D462-383C-4E2E-B564-460EF14C9915}"/>
               </a:ext>
             </a:extLst>
           </p:cNvPr>
@@ -10656,7 +10048,7 @@
           <p:cNvPr id="18" name="p2c">
             <a:extLst xmlns:a="http://schemas.openxmlformats.org/drawingml/2006/main">
               <a:ext uri="{FF2B5EF4-FFF2-40B4-BE49-F238E27FC236}">
-                <a16:creationId xmlns:a16="http://schemas.microsoft.com/office/drawing/2014/main" id="{039BEEB2-6152-4101-843B-D868CDB4E3D2}"/>
+                <a16:creationId xmlns:a16="http://schemas.microsoft.com/office/drawing/2014/main" id="{387DA450-9F34-4744-9650-5BB7936D18D7}"/>
               </a:ext>
             </a:extLst>
           </p:cNvPr>
@@ -10812,7 +10204,7 @@
           <p:cNvPr id="6" name="p3n0">
             <a:extLst xmlns:a="http://schemas.openxmlformats.org/drawingml/2006/main">
               <a:ext uri="{FF2B5EF4-FFF2-40B4-BE49-F238E27FC236}">
-                <a16:creationId xmlns:a16="http://schemas.microsoft.com/office/drawing/2014/main" id="{CE95A481-DDBA-4574-8EEC-D684DBF173B7}"/>
+                <a16:creationId xmlns:a16="http://schemas.microsoft.com/office/drawing/2014/main" id="{A2E77697-9C4D-4642-A594-BC8C61BB4779}"/>
               </a:ext>
             </a:extLst>
           </p:cNvPr>
@@ -10873,7 +10265,7 @@
           <p:cNvPr id="7" name="p3a0">
             <a:extLst xmlns:a="http://schemas.openxmlformats.org/drawingml/2006/main">
               <a:ext uri="{FF2B5EF4-FFF2-40B4-BE49-F238E27FC236}">
-                <a16:creationId xmlns:a16="http://schemas.microsoft.com/office/drawing/2014/main" id="{2AE73BDB-1168-43F5-9AE5-3A7284E5F3AB}"/>
+                <a16:creationId xmlns:a16="http://schemas.microsoft.com/office/drawing/2014/main" id="{7D3025FF-C7FE-4460-8767-8351106FB775}"/>
               </a:ext>
             </a:extLst>
           </p:cNvPr>
@@ -10922,7 +10314,7 @@
                 <a:ea typeface="Microsoft YaHei"/>
                 <a:cs typeface="Microsoft YaHei"/>
               </a:rPr>
-              <a:t>同行评审记录</a:t>
+              <a:t>同行三问</a:t>
             </a:r>
           </a:p>
         </p:txBody>
@@ -10932,7 +10324,7 @@
           <p:cNvPr id="8" name="p3b0">
             <a:extLst xmlns:a="http://schemas.openxmlformats.org/drawingml/2006/main">
               <a:ext uri="{FF2B5EF4-FFF2-40B4-BE49-F238E27FC236}">
-                <a16:creationId xmlns:a16="http://schemas.microsoft.com/office/drawing/2014/main" id="{23E6C95E-423F-494E-95D6-22493636CEC7}"/>
+                <a16:creationId xmlns:a16="http://schemas.microsoft.com/office/drawing/2014/main" id="{913735F8-6443-4C70-8483-E24EF3DE7838}"/>
               </a:ext>
             </a:extLst>
           </p:cNvPr>
@@ -10991,7 +10383,7 @@
           <p:cNvPr id="9" name="p3c0">
             <a:extLst xmlns:a="http://schemas.openxmlformats.org/drawingml/2006/main">
               <a:ext uri="{FF2B5EF4-FFF2-40B4-BE49-F238E27FC236}">
-                <a16:creationId xmlns:a16="http://schemas.microsoft.com/office/drawing/2014/main" id="{90154E78-1883-4D00-AE70-ACD62D6F65C1}"/>
+                <a16:creationId xmlns:a16="http://schemas.microsoft.com/office/drawing/2014/main" id="{0F22E363-22F4-451A-B443-C789F4B50FF9}"/>
               </a:ext>
             </a:extLst>
           </p:cNvPr>
@@ -11027,14 +10419,14 @@
                 <a:spcPct val="110000"/>
               </a:lnSpc>
               <a:buNone/>
-              <a:defRPr sz="1350" b="1">
+              <a:defRPr sz="1800" b="1">
                 <a:solidFill>
                   <a:srgbClr val="667684"/>
                 </a:solidFill>
               </a:defRPr>
             </a:pPr>
             <a:r>
-              <a:rPr sz="1350" b="1">
+              <a:rPr sz="1800" b="1">
                 <a:solidFill>
                   <a:srgbClr val="667684"/>
                 </a:solidFill>
@@ -11042,7 +10434,7 @@
                 <a:ea typeface="Consolas"/>
                 <a:cs typeface="Consolas"/>
               </a:rPr>
-              <a:t>peer-review-log.md</a:t>
+              <a:t>peer-review.md</a:t>
             </a:r>
           </a:p>
         </p:txBody>
@@ -11052,7 +10444,7 @@
           <p:cNvPr id="10" name="p3n1">
             <a:extLst xmlns:a="http://schemas.openxmlformats.org/drawingml/2006/main">
               <a:ext uri="{FF2B5EF4-FFF2-40B4-BE49-F238E27FC236}">
-                <a16:creationId xmlns:a16="http://schemas.microsoft.com/office/drawing/2014/main" id="{B2F809E8-5820-4D23-B450-B49BA2CDCED2}"/>
+                <a16:creationId xmlns:a16="http://schemas.microsoft.com/office/drawing/2014/main" id="{07647864-B373-4BEF-BC7F-DE297D6C6F7D}"/>
               </a:ext>
             </a:extLst>
           </p:cNvPr>
@@ -11113,7 +10505,7 @@
           <p:cNvPr id="11" name="p3a1">
             <a:extLst xmlns:a="http://schemas.openxmlformats.org/drawingml/2006/main">
               <a:ext uri="{FF2B5EF4-FFF2-40B4-BE49-F238E27FC236}">
-                <a16:creationId xmlns:a16="http://schemas.microsoft.com/office/drawing/2014/main" id="{D0DD49B7-DB3D-449E-8BA7-2C8163CC819B}"/>
+                <a16:creationId xmlns:a16="http://schemas.microsoft.com/office/drawing/2014/main" id="{91862042-0353-48D2-8A13-FF20D88027BE}"/>
               </a:ext>
             </a:extLst>
           </p:cNvPr>
@@ -11162,7 +10554,7 @@
                 <a:ea typeface="Microsoft YaHei"/>
                 <a:cs typeface="Microsoft YaHei"/>
               </a:rPr>
-              <a:t>回应记录</a:t>
+              <a:t>作者回应</a:t>
             </a:r>
           </a:p>
         </p:txBody>
@@ -11172,7 +10564,7 @@
           <p:cNvPr id="12" name="p3b1">
             <a:extLst xmlns:a="http://schemas.openxmlformats.org/drawingml/2006/main">
               <a:ext uri="{FF2B5EF4-FFF2-40B4-BE49-F238E27FC236}">
-                <a16:creationId xmlns:a16="http://schemas.microsoft.com/office/drawing/2014/main" id="{9393E0FE-0622-43AA-B7E2-34A6D9CF5E8B}"/>
+                <a16:creationId xmlns:a16="http://schemas.microsoft.com/office/drawing/2014/main" id="{B1349974-0D81-4481-A3A9-5916F95540D3}"/>
               </a:ext>
             </a:extLst>
           </p:cNvPr>
@@ -11231,7 +10623,7 @@
           <p:cNvPr id="13" name="p3c1">
             <a:extLst xmlns:a="http://schemas.openxmlformats.org/drawingml/2006/main">
               <a:ext uri="{FF2B5EF4-FFF2-40B4-BE49-F238E27FC236}">
-                <a16:creationId xmlns:a16="http://schemas.microsoft.com/office/drawing/2014/main" id="{08944E29-4B2F-462F-AA6C-6D369E619851}"/>
+                <a16:creationId xmlns:a16="http://schemas.microsoft.com/office/drawing/2014/main" id="{D03668F8-9FD6-4DAD-A24D-D70A95522403}"/>
               </a:ext>
             </a:extLst>
           </p:cNvPr>
@@ -11267,14 +10659,14 @@
                 <a:spcPct val="110000"/>
               </a:lnSpc>
               <a:buNone/>
-              <a:defRPr sz="1350" b="1">
+              <a:defRPr sz="1800" b="1">
                 <a:solidFill>
                   <a:srgbClr val="667684"/>
                 </a:solidFill>
               </a:defRPr>
             </a:pPr>
             <a:r>
-              <a:rPr sz="1350" b="1">
+              <a:rPr sz="1800" b="1">
                 <a:solidFill>
                   <a:srgbClr val="667684"/>
                 </a:solidFill>
@@ -11282,7 +10674,7 @@
                 <a:ea typeface="Consolas"/>
                 <a:cs typeface="Consolas"/>
               </a:rPr>
-              <a:t>response-log.md</a:t>
+              <a:t>peer-review.md</a:t>
             </a:r>
           </a:p>
         </p:txBody>
@@ -11292,7 +10684,7 @@
           <p:cNvPr id="14" name="p3n2">
             <a:extLst xmlns:a="http://schemas.openxmlformats.org/drawingml/2006/main">
               <a:ext uri="{FF2B5EF4-FFF2-40B4-BE49-F238E27FC236}">
-                <a16:creationId xmlns:a16="http://schemas.microsoft.com/office/drawing/2014/main" id="{8E844513-5102-491B-BBD0-8CB5AEFE5F3E}"/>
+                <a16:creationId xmlns:a16="http://schemas.microsoft.com/office/drawing/2014/main" id="{59CBE6F1-FFD1-4545-B3DF-058F2BE3F11E}"/>
               </a:ext>
             </a:extLst>
           </p:cNvPr>
@@ -11353,7 +10745,7 @@
           <p:cNvPr id="15" name="p3a2">
             <a:extLst xmlns:a="http://schemas.openxmlformats.org/drawingml/2006/main">
               <a:ext uri="{FF2B5EF4-FFF2-40B4-BE49-F238E27FC236}">
-                <a16:creationId xmlns:a16="http://schemas.microsoft.com/office/drawing/2014/main" id="{0C097657-BC96-41B7-9301-A9C135173043}"/>
+                <a16:creationId xmlns:a16="http://schemas.microsoft.com/office/drawing/2014/main" id="{428E3085-8AC8-401D-996A-16242DC326DA}"/>
               </a:ext>
             </a:extLst>
           </p:cNvPr>
@@ -11412,7 +10804,7 @@
           <p:cNvPr id="16" name="p3b2">
             <a:extLst xmlns:a="http://schemas.openxmlformats.org/drawingml/2006/main">
               <a:ext uri="{FF2B5EF4-FFF2-40B4-BE49-F238E27FC236}">
-                <a16:creationId xmlns:a16="http://schemas.microsoft.com/office/drawing/2014/main" id="{0FCE98D6-A94F-4FDF-8EEC-3CC35EA50F1F}"/>
+                <a16:creationId xmlns:a16="http://schemas.microsoft.com/office/drawing/2014/main" id="{B564CA60-6AAF-484B-A3C3-8483F033B4CC}"/>
               </a:ext>
             </a:extLst>
           </p:cNvPr>
@@ -11471,7 +10863,7 @@
           <p:cNvPr id="17" name="p3c2">
             <a:extLst xmlns:a="http://schemas.openxmlformats.org/drawingml/2006/main">
               <a:ext uri="{FF2B5EF4-FFF2-40B4-BE49-F238E27FC236}">
-                <a16:creationId xmlns:a16="http://schemas.microsoft.com/office/drawing/2014/main" id="{43FB2010-533E-49F0-810D-240F5ED0B780}"/>
+                <a16:creationId xmlns:a16="http://schemas.microsoft.com/office/drawing/2014/main" id="{40FACBA4-219B-4B20-A285-2D11CF3C10FD}"/>
               </a:ext>
             </a:extLst>
           </p:cNvPr>
@@ -11507,14 +10899,14 @@
                 <a:spcPct val="110000"/>
               </a:lnSpc>
               <a:buNone/>
-              <a:defRPr sz="1350" b="1">
+              <a:defRPr sz="1800" b="1">
                 <a:solidFill>
                   <a:srgbClr val="667684"/>
                 </a:solidFill>
               </a:defRPr>
             </a:pPr>
             <a:r>
-              <a:rPr sz="1350" b="1">
+              <a:rPr sz="1800" b="1">
                 <a:solidFill>
                   <a:srgbClr val="667684"/>
                 </a:solidFill>
@@ -11522,7 +10914,7 @@
                 <a:ea typeface="Consolas"/>
                 <a:cs typeface="Consolas"/>
               </a:rPr>
-              <a:t>revision-priority.md</a:t>
+              <a:t>revision-plan.md</a:t>
             </a:r>
           </a:p>
         </p:txBody>
@@ -11532,7 +10924,7 @@
           <p:cNvPr id="18" name="p3n3">
             <a:extLst xmlns:a="http://schemas.openxmlformats.org/drawingml/2006/main">
               <a:ext uri="{FF2B5EF4-FFF2-40B4-BE49-F238E27FC236}">
-                <a16:creationId xmlns:a16="http://schemas.microsoft.com/office/drawing/2014/main" id="{D8980EDF-29E0-4FB1-AF22-DBA690A14C1A}"/>
+                <a16:creationId xmlns:a16="http://schemas.microsoft.com/office/drawing/2014/main" id="{9A7EF6B5-A6C2-42FB-A05A-D9CEAB246599}"/>
               </a:ext>
             </a:extLst>
           </p:cNvPr>
@@ -11593,7 +10985,7 @@
           <p:cNvPr id="19" name="p3a3">
             <a:extLst xmlns:a="http://schemas.openxmlformats.org/drawingml/2006/main">
               <a:ext uri="{FF2B5EF4-FFF2-40B4-BE49-F238E27FC236}">
-                <a16:creationId xmlns:a16="http://schemas.microsoft.com/office/drawing/2014/main" id="{502567CA-CBD4-4F8C-AA38-BA5295B90A61}"/>
+                <a16:creationId xmlns:a16="http://schemas.microsoft.com/office/drawing/2014/main" id="{9197D2CE-C8A5-4A8E-B44D-9E3E48DC06A3}"/>
               </a:ext>
             </a:extLst>
           </p:cNvPr>
@@ -11652,7 +11044,7 @@
           <p:cNvPr id="20" name="p3b3">
             <a:extLst xmlns:a="http://schemas.openxmlformats.org/drawingml/2006/main">
               <a:ext uri="{FF2B5EF4-FFF2-40B4-BE49-F238E27FC236}">
-                <a16:creationId xmlns:a16="http://schemas.microsoft.com/office/drawing/2014/main" id="{47526780-C109-412A-80D8-EACCF222BAAE}"/>
+                <a16:creationId xmlns:a16="http://schemas.microsoft.com/office/drawing/2014/main" id="{67F369F8-E1EF-4351-AF18-08F6F3768ED5}"/>
               </a:ext>
             </a:extLst>
           </p:cNvPr>
@@ -11711,7 +11103,7 @@
           <p:cNvPr id="21" name="p3c3">
             <a:extLst xmlns:a="http://schemas.openxmlformats.org/drawingml/2006/main">
               <a:ext uri="{FF2B5EF4-FFF2-40B4-BE49-F238E27FC236}">
-                <a16:creationId xmlns:a16="http://schemas.microsoft.com/office/drawing/2014/main" id="{D75294EC-8C45-4EE2-B58B-136C6309F3B7}"/>
+                <a16:creationId xmlns:a16="http://schemas.microsoft.com/office/drawing/2014/main" id="{E6816DF0-FD12-4E83-A77F-1E2F4BDC058B}"/>
               </a:ext>
             </a:extLst>
           </p:cNvPr>
@@ -11747,14 +11139,14 @@
                 <a:spcPct val="110000"/>
               </a:lnSpc>
               <a:buNone/>
-              <a:defRPr sz="1350" b="1">
+              <a:defRPr sz="1800" b="1">
                 <a:solidFill>
                   <a:srgbClr val="C8161E"/>
                 </a:solidFill>
               </a:defRPr>
             </a:pPr>
             <a:r>
-              <a:rPr sz="1350" b="1">
+              <a:rPr sz="1800" b="1">
                 <a:solidFill>
                   <a:srgbClr val="C8161E"/>
                 </a:solidFill>
@@ -11762,7 +11154,7 @@
                 <a:ea typeface="Consolas"/>
                 <a:cs typeface="Consolas"/>
               </a:rPr>
-              <a:t>notes/argument-gate.md</a:t>
+              <a:t>revision-plan.md</a:t>
             </a:r>
           </a:p>
         </p:txBody>
@@ -11772,7 +11164,7 @@
           <p:cNvPr id="22" name="p3c0">
             <a:extLst xmlns:a="http://schemas.openxmlformats.org/drawingml/2006/main">
               <a:ext uri="{FF2B5EF4-FFF2-40B4-BE49-F238E27FC236}">
-                <a16:creationId xmlns:a16="http://schemas.microsoft.com/office/drawing/2014/main" id="{F2A141DC-16FC-49D9-88D7-6BE80C818A3D}"/>
+                <a16:creationId xmlns:a16="http://schemas.microsoft.com/office/drawing/2014/main" id="{D9673625-CFBB-4B41-BDFF-EB8AE9685712}"/>
               </a:ext>
             </a:extLst>
           </p:cNvPr>
@@ -11821,7 +11213,7 @@
                 <a:ea typeface="Microsoft YaHei"/>
                 <a:cs typeface="Microsoft YaHei"/>
               </a:rPr>
-              <a:t>本课不正式提交；四项工件在第 16 课统一检查。</a:t>
+              <a:t>本课不正式提交；两个工件在第 16 课统一检查。</a:t>
             </a:r>
           </a:p>
         </p:txBody>
@@ -11928,34 +11320,36 @@
           <p:cNvPr id="6" name="lab">
             <a:extLst xmlns:a="http://schemas.openxmlformats.org/drawingml/2006/main">
               <a:ext uri="{FF2B5EF4-FFF2-40B4-BE49-F238E27FC236}">
-                <a16:creationId xmlns:a16="http://schemas.microsoft.com/office/drawing/2014/main" id="{3A0D3954-FA6C-413D-93C7-2DFCEFD33E42}"/>
-              </a:ext>
-            </a:extLst>
-          </p:cNvPr>
-          <p:cNvSpPr>
-            <a:spLocks xmlns:a="http://schemas.openxmlformats.org/drawingml/2006/main" noGrp="1"/>
-          </p:cNvSpPr>
-          <p:nvPr/>
-        </p:nvSpPr>
-        <p:spPr>
-          <a:xfrm xmlns:a="http://schemas.openxmlformats.org/drawingml/2006/main">
-            <a:off x="7810500" y="838200"/>
-            <a:ext cx="3752850" cy="323850"/>
+                <a16:creationId xmlns:a16="http://schemas.microsoft.com/office/drawing/2014/main" id="{7C71893D-290D-4DB3-AFA1-79E80AA0757B}"/>
+              </a:ext>
+            </a:extLst>
+          </p:cNvPr>
+          <p:cNvSpPr>
+            <a:spLocks xmlns:a="http://schemas.openxmlformats.org/drawingml/2006/main" noGrp="1"/>
+          </p:cNvSpPr>
+          <p:nvPr/>
+        </p:nvSpPr>
+        <p:spPr>
+          <a:xfrm xmlns:a="http://schemas.openxmlformats.org/drawingml/2006/main">
+            <a:off x="6953250" y="781050"/>
+            <a:ext cx="4610100" cy="438150"/>
           </a:xfrm>
           <a:prstGeom xmlns:a="http://schemas.openxmlformats.org/drawingml/2006/main" prst="rect">
             <a:avLst/>
           </a:prstGeom>
-          <a:noFill xmlns:a="http://schemas.openxmlformats.org/drawingml/2006/main"/>
-          <a:ln xmlns:a="http://schemas.openxmlformats.org/drawingml/2006/main" w="0">
-            <a:noFill/>
-            <a:prstDash val="solid"/>
-          </a:ln>
-        </p:spPr>
-        <p:txBody>
-          <a:bodyPr xmlns:a="http://schemas.openxmlformats.org/drawingml/2006/main" lIns="76200" tIns="38100" rIns="76200" bIns="38100" anchor="ctr"/>
-          <a:lstStyle xmlns:a="http://schemas.openxmlformats.org/drawingml/2006/main"/>
-          <a:p xmlns:a="http://schemas.openxmlformats.org/drawingml/2006/main">
-            <a:pPr algn="r">
+          <a:solidFill xmlns:a="http://schemas.openxmlformats.org/drawingml/2006/main">
+            <a:srgbClr val="F8E9EA"/>
+          </a:solidFill>
+          <a:ln xmlns:a="http://schemas.openxmlformats.org/drawingml/2006/main" w="0">
+            <a:noFill/>
+            <a:prstDash val="solid"/>
+          </a:ln>
+        </p:spPr>
+        <p:txBody>
+          <a:bodyPr xmlns:a="http://schemas.openxmlformats.org/drawingml/2006/main" lIns="76200" tIns="38100" rIns="76200" bIns="38100" anchor="ctr"/>
+          <a:lstStyle xmlns:a="http://schemas.openxmlformats.org/drawingml/2006/main"/>
+          <a:p xmlns:a="http://schemas.openxmlformats.org/drawingml/2006/main">
+            <a:pPr algn="ctr">
               <a:lnSpc>
                 <a:spcPct val="110000"/>
               </a:lnSpc>
@@ -11967,7 +11361,7 @@
               </a:defRPr>
             </a:pPr>
             <a:r>
-              <a:rPr sz="1125" b="1">
+              <a:rPr sz="1800" b="1">
                 <a:solidFill>
                   <a:srgbClr val="C8161E"/>
                 </a:solidFill>
@@ -11975,7 +11369,7 @@
                 <a:ea typeface="Microsoft YaHei"/>
                 <a:cs typeface="Microsoft YaHei"/>
               </a:rPr>
-              <a:t>教师构造匿名样例｜非真实学生材料</a:t>
+              <a:t>教师构造虚构样例｜非真实学生材料</a:t>
             </a:r>
           </a:p>
         </p:txBody>
@@ -11985,7 +11379,7 @@
           <p:cNvPr id="7" name="sample">
             <a:extLst xmlns:a="http://schemas.openxmlformats.org/drawingml/2006/main">
               <a:ext uri="{FF2B5EF4-FFF2-40B4-BE49-F238E27FC236}">
-                <a16:creationId xmlns:a16="http://schemas.microsoft.com/office/drawing/2014/main" id="{36E5EA6D-CE39-43BE-8E0E-4DA045E220F3}"/>
+                <a16:creationId xmlns:a16="http://schemas.microsoft.com/office/drawing/2014/main" id="{C7EBBF17-8A68-40B3-8534-495BA392ACA8}"/>
               </a:ext>
             </a:extLst>
           </p:cNvPr>
@@ -12070,7 +11464,7 @@
           <p:cNvPr id="8" name="p4a0">
             <a:extLst xmlns:a="http://schemas.openxmlformats.org/drawingml/2006/main">
               <a:ext uri="{FF2B5EF4-FFF2-40B4-BE49-F238E27FC236}">
-                <a16:creationId xmlns:a16="http://schemas.microsoft.com/office/drawing/2014/main" id="{ED64D610-3C29-434B-99C0-4E720296B24C}"/>
+                <a16:creationId xmlns:a16="http://schemas.microsoft.com/office/drawing/2014/main" id="{25EE5E2C-661E-44CF-B5D2-3EA773E1AEA0}"/>
               </a:ext>
             </a:extLst>
           </p:cNvPr>
@@ -12131,7 +11525,7 @@
           <p:cNvPr id="9" name="p4b0">
             <a:extLst xmlns:a="http://schemas.openxmlformats.org/drawingml/2006/main">
               <a:ext uri="{FF2B5EF4-FFF2-40B4-BE49-F238E27FC236}">
-                <a16:creationId xmlns:a16="http://schemas.microsoft.com/office/drawing/2014/main" id="{99305D2E-3806-4807-90EB-8482A0098915}"/>
+                <a16:creationId xmlns:a16="http://schemas.microsoft.com/office/drawing/2014/main" id="{C8E66609-1C20-4E82-8AE4-0723F230378B}"/>
               </a:ext>
             </a:extLst>
           </p:cNvPr>
@@ -12190,7 +11584,7 @@
           <p:cNvPr id="10" name="p4a1">
             <a:extLst xmlns:a="http://schemas.openxmlformats.org/drawingml/2006/main">
               <a:ext uri="{FF2B5EF4-FFF2-40B4-BE49-F238E27FC236}">
-                <a16:creationId xmlns:a16="http://schemas.microsoft.com/office/drawing/2014/main" id="{C402F9F0-D0FD-4D71-B2DF-85957AB3397D}"/>
+                <a16:creationId xmlns:a16="http://schemas.microsoft.com/office/drawing/2014/main" id="{0ECC26BE-8914-418C-B0F0-7A09FFBF74F9}"/>
               </a:ext>
             </a:extLst>
           </p:cNvPr>
@@ -12251,7 +11645,7 @@
           <p:cNvPr id="11" name="p4b1">
             <a:extLst xmlns:a="http://schemas.openxmlformats.org/drawingml/2006/main">
               <a:ext uri="{FF2B5EF4-FFF2-40B4-BE49-F238E27FC236}">
-                <a16:creationId xmlns:a16="http://schemas.microsoft.com/office/drawing/2014/main" id="{4FE21EEB-B87D-4E31-8566-D0602A8D38F7}"/>
+                <a16:creationId xmlns:a16="http://schemas.microsoft.com/office/drawing/2014/main" id="{69512867-63D4-4ECA-B3E0-030802B6AFC9}"/>
               </a:ext>
             </a:extLst>
           </p:cNvPr>
@@ -12310,7 +11704,7 @@
           <p:cNvPr id="12" name="p4a2">
             <a:extLst xmlns:a="http://schemas.openxmlformats.org/drawingml/2006/main">
               <a:ext uri="{FF2B5EF4-FFF2-40B4-BE49-F238E27FC236}">
-                <a16:creationId xmlns:a16="http://schemas.microsoft.com/office/drawing/2014/main" id="{097760A7-788C-4E03-A322-E3FD3DAC2354}"/>
+                <a16:creationId xmlns:a16="http://schemas.microsoft.com/office/drawing/2014/main" id="{1916B36B-AE53-463E-9044-E0373CEB7306}"/>
               </a:ext>
             </a:extLst>
           </p:cNvPr>
@@ -12371,7 +11765,7 @@
           <p:cNvPr id="13" name="p4b2">
             <a:extLst xmlns:a="http://schemas.openxmlformats.org/drawingml/2006/main">
               <a:ext uri="{FF2B5EF4-FFF2-40B4-BE49-F238E27FC236}">
-                <a16:creationId xmlns:a16="http://schemas.microsoft.com/office/drawing/2014/main" id="{A10B6457-07CA-44F0-BCAF-FBD9D65C1407}"/>
+                <a16:creationId xmlns:a16="http://schemas.microsoft.com/office/drawing/2014/main" id="{C8133FA9-CDDE-49D8-9765-DB4EC8D47D13}"/>
               </a:ext>
             </a:extLst>
           </p:cNvPr>
@@ -12430,7 +11824,7 @@
           <p:cNvPr id="14" name="p4c">
             <a:extLst xmlns:a="http://schemas.openxmlformats.org/drawingml/2006/main">
               <a:ext uri="{FF2B5EF4-FFF2-40B4-BE49-F238E27FC236}">
-                <a16:creationId xmlns:a16="http://schemas.microsoft.com/office/drawing/2014/main" id="{CD5A26B7-D0C7-44C6-B68F-E9D4EBD67FC8}"/>
+                <a16:creationId xmlns:a16="http://schemas.microsoft.com/office/drawing/2014/main" id="{FAA83B1D-65F5-463E-BD75-7FE0B24DEAC5}"/>
               </a:ext>
             </a:extLst>
           </p:cNvPr>
@@ -12586,7 +11980,7 @@
           <p:cNvPr id="6" name="p50a">
             <a:extLst xmlns:a="http://schemas.openxmlformats.org/drawingml/2006/main">
               <a:ext uri="{FF2B5EF4-FFF2-40B4-BE49-F238E27FC236}">
-                <a16:creationId xmlns:a16="http://schemas.microsoft.com/office/drawing/2014/main" id="{A2456A6E-838A-4E89-BA7A-B69F8424D8A4}"/>
+                <a16:creationId xmlns:a16="http://schemas.microsoft.com/office/drawing/2014/main" id="{A22890B8-0EFB-48BA-947D-234D88D50104}"/>
               </a:ext>
             </a:extLst>
           </p:cNvPr>
@@ -12647,7 +12041,7 @@
           <p:cNvPr id="7" name="p50b">
             <a:extLst xmlns:a="http://schemas.openxmlformats.org/drawingml/2006/main">
               <a:ext uri="{FF2B5EF4-FFF2-40B4-BE49-F238E27FC236}">
-                <a16:creationId xmlns:a16="http://schemas.microsoft.com/office/drawing/2014/main" id="{97A94194-BE28-4E8B-8414-45004D18707C}"/>
+                <a16:creationId xmlns:a16="http://schemas.microsoft.com/office/drawing/2014/main" id="{BAD59614-8C06-445A-A9C7-2D00976C6932}"/>
               </a:ext>
             </a:extLst>
           </p:cNvPr>
@@ -12706,7 +12100,7 @@
           <p:cNvPr id="8" name="p51a">
             <a:extLst xmlns:a="http://schemas.openxmlformats.org/drawingml/2006/main">
               <a:ext uri="{FF2B5EF4-FFF2-40B4-BE49-F238E27FC236}">
-                <a16:creationId xmlns:a16="http://schemas.microsoft.com/office/drawing/2014/main" id="{6FA4C6BC-607B-4A77-A3C9-0AC2305DEA18}"/>
+                <a16:creationId xmlns:a16="http://schemas.microsoft.com/office/drawing/2014/main" id="{31795B3C-45E8-48CD-BBF3-11FF2713C860}"/>
               </a:ext>
             </a:extLst>
           </p:cNvPr>
@@ -12767,7 +12161,7 @@
           <p:cNvPr id="9" name="p51b">
             <a:extLst xmlns:a="http://schemas.openxmlformats.org/drawingml/2006/main">
               <a:ext uri="{FF2B5EF4-FFF2-40B4-BE49-F238E27FC236}">
-                <a16:creationId xmlns:a16="http://schemas.microsoft.com/office/drawing/2014/main" id="{0B2B26C3-8EE6-4697-A2E0-F3ABEAAAC188}"/>
+                <a16:creationId xmlns:a16="http://schemas.microsoft.com/office/drawing/2014/main" id="{3FD159AA-D1BF-4B01-AF8E-544F9449A516}"/>
               </a:ext>
             </a:extLst>
           </p:cNvPr>
@@ -12816,7 +12210,7 @@
                 <a:ea typeface="Microsoft YaHei"/>
                 <a:cs typeface="Microsoft YaHei"/>
               </a:rPr>
-              <a:t>直接证据；stable 原则上两项独立；呈现冲突</a:t>
+              <a:t>直接证据；冲突、失败与负向结果均保留</a:t>
             </a:r>
           </a:p>
         </p:txBody>
@@ -12826,7 +12220,7 @@
           <p:cNvPr id="10" name="p52a">
             <a:extLst xmlns:a="http://schemas.openxmlformats.org/drawingml/2006/main">
               <a:ext uri="{FF2B5EF4-FFF2-40B4-BE49-F238E27FC236}">
-                <a16:creationId xmlns:a16="http://schemas.microsoft.com/office/drawing/2014/main" id="{35D00742-99E9-4EB4-B121-12D1753F10E0}"/>
+                <a16:creationId xmlns:a16="http://schemas.microsoft.com/office/drawing/2014/main" id="{F9362C93-1604-4B60-90E7-56A192598A41}"/>
               </a:ext>
             </a:extLst>
           </p:cNvPr>
@@ -12887,7 +12281,7 @@
           <p:cNvPr id="11" name="p52b">
             <a:extLst xmlns:a="http://schemas.openxmlformats.org/drawingml/2006/main">
               <a:ext uri="{FF2B5EF4-FFF2-40B4-BE49-F238E27FC236}">
-                <a16:creationId xmlns:a16="http://schemas.microsoft.com/office/drawing/2014/main" id="{71F2C7C0-96DA-46FC-B702-F83A36B7955F}"/>
+                <a16:creationId xmlns:a16="http://schemas.microsoft.com/office/drawing/2014/main" id="{18959AF3-5B85-4230-8AA5-9542EE345C68}"/>
               </a:ext>
             </a:extLst>
           </p:cNvPr>
@@ -12936,7 +12330,7 @@
                 <a:ea typeface="Microsoft YaHei"/>
                 <a:cs typeface="Microsoft YaHei"/>
               </a:rPr>
-              <a:t>内部 / 外部 / 构念 / 结论有效性或等价威胁</a:t>
+              <a:t>威胁 + 失败根因 + 不适用边界</a:t>
             </a:r>
           </a:p>
         </p:txBody>
@@ -12946,7 +12340,7 @@
           <p:cNvPr id="12" name="p53a">
             <a:extLst xmlns:a="http://schemas.openxmlformats.org/drawingml/2006/main">
               <a:ext uri="{FF2B5EF4-FFF2-40B4-BE49-F238E27FC236}">
-                <a16:creationId xmlns:a16="http://schemas.microsoft.com/office/drawing/2014/main" id="{00231B33-5C7D-4038-987C-E157BA002055}"/>
+                <a16:creationId xmlns:a16="http://schemas.microsoft.com/office/drawing/2014/main" id="{25607918-4277-4C60-BD20-7014125E06C3}"/>
               </a:ext>
             </a:extLst>
           </p:cNvPr>
@@ -13007,7 +12401,7 @@
           <p:cNvPr id="13" name="p53b">
             <a:extLst xmlns:a="http://schemas.openxmlformats.org/drawingml/2006/main">
               <a:ext uri="{FF2B5EF4-FFF2-40B4-BE49-F238E27FC236}">
-                <a16:creationId xmlns:a16="http://schemas.microsoft.com/office/drawing/2014/main" id="{4BF038A0-77BB-4691-87E3-955225810F2F}"/>
+                <a16:creationId xmlns:a16="http://schemas.microsoft.com/office/drawing/2014/main" id="{5139B46C-5E75-43FA-9438-2980B3692C1C}"/>
               </a:ext>
             </a:extLst>
           </p:cNvPr>
@@ -13066,7 +12460,7 @@
           <p:cNvPr id="14" name="p54a">
             <a:extLst xmlns:a="http://schemas.openxmlformats.org/drawingml/2006/main">
               <a:ext uri="{FF2B5EF4-FFF2-40B4-BE49-F238E27FC236}">
-                <a16:creationId xmlns:a16="http://schemas.microsoft.com/office/drawing/2014/main" id="{9C76ADAA-59E9-414A-B0ED-22E85B9D82B9}"/>
+                <a16:creationId xmlns:a16="http://schemas.microsoft.com/office/drawing/2014/main" id="{F15A3F2B-617E-438B-A71E-CDB99F7BE0A6}"/>
               </a:ext>
             </a:extLst>
           </p:cNvPr>
@@ -13127,7 +12521,7 @@
           <p:cNvPr id="15" name="p54b">
             <a:extLst xmlns:a="http://schemas.openxmlformats.org/drawingml/2006/main">
               <a:ext uri="{FF2B5EF4-FFF2-40B4-BE49-F238E27FC236}">
-                <a16:creationId xmlns:a16="http://schemas.microsoft.com/office/drawing/2014/main" id="{4126A258-B32A-4BC2-947B-C6504B255508}"/>
+                <a16:creationId xmlns:a16="http://schemas.microsoft.com/office/drawing/2014/main" id="{F115C85E-6773-4C71-9B5A-F5CE6636018E}"/>
               </a:ext>
             </a:extLst>
           </p:cNvPr>
@@ -13186,7 +12580,7 @@
           <p:cNvPr id="16" name="p5c">
             <a:extLst xmlns:a="http://schemas.openxmlformats.org/drawingml/2006/main">
               <a:ext uri="{FF2B5EF4-FFF2-40B4-BE49-F238E27FC236}">
-                <a16:creationId xmlns:a16="http://schemas.microsoft.com/office/drawing/2014/main" id="{43810E49-85AC-4A64-927A-D63CEF7C7451}"/>
+                <a16:creationId xmlns:a16="http://schemas.microsoft.com/office/drawing/2014/main" id="{513966B8-AAB4-4D7F-98D0-CD78CF2ED3E3}"/>
               </a:ext>
             </a:extLst>
           </p:cNvPr>
@@ -13342,7 +12736,7 @@
           <p:cNvPr id="6" name="h1">
             <a:extLst xmlns:a="http://schemas.openxmlformats.org/drawingml/2006/main">
               <a:ext uri="{FF2B5EF4-FFF2-40B4-BE49-F238E27FC236}">
-                <a16:creationId xmlns:a16="http://schemas.microsoft.com/office/drawing/2014/main" id="{73D0F147-073C-4DA2-A2A9-B0CD7D69C22B}"/>
+                <a16:creationId xmlns:a16="http://schemas.microsoft.com/office/drawing/2014/main" id="{FF6980EC-DA2C-4B67-AB24-085ED0F5DB58}"/>
               </a:ext>
             </a:extLst>
           </p:cNvPr>
@@ -13399,7 +12793,7 @@
           <p:cNvPr id="7" name="p6q0a">
             <a:extLst xmlns:a="http://schemas.openxmlformats.org/drawingml/2006/main">
               <a:ext uri="{FF2B5EF4-FFF2-40B4-BE49-F238E27FC236}">
-                <a16:creationId xmlns:a16="http://schemas.microsoft.com/office/drawing/2014/main" id="{AE69B0F5-2025-490A-9914-57FFAA95680D}"/>
+                <a16:creationId xmlns:a16="http://schemas.microsoft.com/office/drawing/2014/main" id="{2B3678F2-A27F-40CB-BE1B-8CB32D22FAB7}"/>
               </a:ext>
             </a:extLst>
           </p:cNvPr>
@@ -13460,7 +12854,7 @@
           <p:cNvPr id="8" name="p6q0b">
             <a:extLst xmlns:a="http://schemas.openxmlformats.org/drawingml/2006/main">
               <a:ext uri="{FF2B5EF4-FFF2-40B4-BE49-F238E27FC236}">
-                <a16:creationId xmlns:a16="http://schemas.microsoft.com/office/drawing/2014/main" id="{DE2805DB-E903-4284-B79C-3576A3104154}"/>
+                <a16:creationId xmlns:a16="http://schemas.microsoft.com/office/drawing/2014/main" id="{5ADCC2DE-B769-4251-B847-ADD200E1DDE7}"/>
               </a:ext>
             </a:extLst>
           </p:cNvPr>
@@ -13519,7 +12913,7 @@
           <p:cNvPr id="9" name="p6q1a">
             <a:extLst xmlns:a="http://schemas.openxmlformats.org/drawingml/2006/main">
               <a:ext uri="{FF2B5EF4-FFF2-40B4-BE49-F238E27FC236}">
-                <a16:creationId xmlns:a16="http://schemas.microsoft.com/office/drawing/2014/main" id="{685691BC-2829-4A2D-BA10-FD6F91CA8B4A}"/>
+                <a16:creationId xmlns:a16="http://schemas.microsoft.com/office/drawing/2014/main" id="{C679DE03-6DDF-4A79-A7F5-BDCCE3F6A70C}"/>
               </a:ext>
             </a:extLst>
           </p:cNvPr>
@@ -13580,7 +12974,7 @@
           <p:cNvPr id="10" name="p6q1b">
             <a:extLst xmlns:a="http://schemas.openxmlformats.org/drawingml/2006/main">
               <a:ext uri="{FF2B5EF4-FFF2-40B4-BE49-F238E27FC236}">
-                <a16:creationId xmlns:a16="http://schemas.microsoft.com/office/drawing/2014/main" id="{7AED6E75-46EE-4CF8-83FA-0B83D2E4E2E1}"/>
+                <a16:creationId xmlns:a16="http://schemas.microsoft.com/office/drawing/2014/main" id="{ADF492D5-9E1A-4A52-9FA2-243E057049BD}"/>
               </a:ext>
             </a:extLst>
           </p:cNvPr>
@@ -13639,7 +13033,7 @@
           <p:cNvPr id="11" name="p6q2a">
             <a:extLst xmlns:a="http://schemas.openxmlformats.org/drawingml/2006/main">
               <a:ext uri="{FF2B5EF4-FFF2-40B4-BE49-F238E27FC236}">
-                <a16:creationId xmlns:a16="http://schemas.microsoft.com/office/drawing/2014/main" id="{FD21B97D-EF72-4313-B9E1-3CF7D1E387F9}"/>
+                <a16:creationId xmlns:a16="http://schemas.microsoft.com/office/drawing/2014/main" id="{ECE6CC96-F2E1-4393-8174-D4D33F43E880}"/>
               </a:ext>
             </a:extLst>
           </p:cNvPr>
@@ -13700,7 +13094,7 @@
           <p:cNvPr id="12" name="p6q2b">
             <a:extLst xmlns:a="http://schemas.openxmlformats.org/drawingml/2006/main">
               <a:ext uri="{FF2B5EF4-FFF2-40B4-BE49-F238E27FC236}">
-                <a16:creationId xmlns:a16="http://schemas.microsoft.com/office/drawing/2014/main" id="{46697A4C-F0EE-4689-B95E-CB698F3A2B37}"/>
+                <a16:creationId xmlns:a16="http://schemas.microsoft.com/office/drawing/2014/main" id="{8AC176B4-0923-4508-9592-0412559F8E5B}"/>
               </a:ext>
             </a:extLst>
           </p:cNvPr>
@@ -13759,7 +13153,7 @@
           <p:cNvPr id="13" name="p6mid">
             <a:extLst xmlns:a="http://schemas.openxmlformats.org/drawingml/2006/main">
               <a:ext uri="{FF2B5EF4-FFF2-40B4-BE49-F238E27FC236}">
-                <a16:creationId xmlns:a16="http://schemas.microsoft.com/office/drawing/2014/main" id="{64628D6F-60D6-41CB-8B53-C156218A0472}"/>
+                <a16:creationId xmlns:a16="http://schemas.microsoft.com/office/drawing/2014/main" id="{785ADA0F-1C69-4851-8621-59E4759769C1}"/>
               </a:ext>
             </a:extLst>
           </p:cNvPr>
@@ -13790,7 +13184,7 @@
           <p:cNvPr id="14" name="h2">
             <a:extLst xmlns:a="http://schemas.openxmlformats.org/drawingml/2006/main">
               <a:ext uri="{FF2B5EF4-FFF2-40B4-BE49-F238E27FC236}">
-                <a16:creationId xmlns:a16="http://schemas.microsoft.com/office/drawing/2014/main" id="{65DE4713-1B12-400E-AFF9-3369451106A7}"/>
+                <a16:creationId xmlns:a16="http://schemas.microsoft.com/office/drawing/2014/main" id="{C56DC3B2-C708-4E66-A135-6BD056AA2738}"/>
               </a:ext>
             </a:extLst>
           </p:cNvPr>
@@ -13847,7 +13241,7 @@
           <p:cNvPr id="15" name="p6b0a">
             <a:extLst xmlns:a="http://schemas.openxmlformats.org/drawingml/2006/main">
               <a:ext uri="{FF2B5EF4-FFF2-40B4-BE49-F238E27FC236}">
-                <a16:creationId xmlns:a16="http://schemas.microsoft.com/office/drawing/2014/main" id="{D1E8D0A7-9A4A-4386-9576-CB3F0B953F15}"/>
+                <a16:creationId xmlns:a16="http://schemas.microsoft.com/office/drawing/2014/main" id="{A34228B2-7933-409C-882C-FC656BCA7867}"/>
               </a:ext>
             </a:extLst>
           </p:cNvPr>
@@ -13908,7 +13302,7 @@
           <p:cNvPr id="16" name="p6b0b">
             <a:extLst xmlns:a="http://schemas.openxmlformats.org/drawingml/2006/main">
               <a:ext uri="{FF2B5EF4-FFF2-40B4-BE49-F238E27FC236}">
-                <a16:creationId xmlns:a16="http://schemas.microsoft.com/office/drawing/2014/main" id="{628109D6-A79B-4255-879E-35568818CA1A}"/>
+                <a16:creationId xmlns:a16="http://schemas.microsoft.com/office/drawing/2014/main" id="{DC5A0E69-E698-4D16-BCD3-9371F8B29D1A}"/>
               </a:ext>
             </a:extLst>
           </p:cNvPr>
@@ -13967,7 +13361,7 @@
           <p:cNvPr id="17" name="p6b1a">
             <a:extLst xmlns:a="http://schemas.openxmlformats.org/drawingml/2006/main">
               <a:ext uri="{FF2B5EF4-FFF2-40B4-BE49-F238E27FC236}">
-                <a16:creationId xmlns:a16="http://schemas.microsoft.com/office/drawing/2014/main" id="{19BA4E76-830B-43F7-BC6F-D9778A9C8BFF}"/>
+                <a16:creationId xmlns:a16="http://schemas.microsoft.com/office/drawing/2014/main" id="{62D8A89A-F60E-4BB3-90AD-ED9587BA3B78}"/>
               </a:ext>
             </a:extLst>
           </p:cNvPr>
@@ -14028,7 +13422,7 @@
           <p:cNvPr id="18" name="p6b1b">
             <a:extLst xmlns:a="http://schemas.openxmlformats.org/drawingml/2006/main">
               <a:ext uri="{FF2B5EF4-FFF2-40B4-BE49-F238E27FC236}">
-                <a16:creationId xmlns:a16="http://schemas.microsoft.com/office/drawing/2014/main" id="{C2DDC0CC-89EA-43CC-B44D-8CAAF9E226C3}"/>
+                <a16:creationId xmlns:a16="http://schemas.microsoft.com/office/drawing/2014/main" id="{B94C952A-5419-45EB-AAB2-6DF8BE909B4E}"/>
               </a:ext>
             </a:extLst>
           </p:cNvPr>
@@ -14087,7 +13481,7 @@
           <p:cNvPr id="19" name="p6b2a">
             <a:extLst xmlns:a="http://schemas.openxmlformats.org/drawingml/2006/main">
               <a:ext uri="{FF2B5EF4-FFF2-40B4-BE49-F238E27FC236}">
-                <a16:creationId xmlns:a16="http://schemas.microsoft.com/office/drawing/2014/main" id="{C7FEB97C-3562-4C4B-96FA-CB05119772FE}"/>
+                <a16:creationId xmlns:a16="http://schemas.microsoft.com/office/drawing/2014/main" id="{AB3AC1AD-48E5-4B97-B5D7-53052B9ACA36}"/>
               </a:ext>
             </a:extLst>
           </p:cNvPr>
@@ -14148,7 +13542,7 @@
           <p:cNvPr id="20" name="p6b2b">
             <a:extLst xmlns:a="http://schemas.openxmlformats.org/drawingml/2006/main">
               <a:ext uri="{FF2B5EF4-FFF2-40B4-BE49-F238E27FC236}">
-                <a16:creationId xmlns:a16="http://schemas.microsoft.com/office/drawing/2014/main" id="{872CFAD3-5DFB-4158-9F15-8D39050C27E1}"/>
+                <a16:creationId xmlns:a16="http://schemas.microsoft.com/office/drawing/2014/main" id="{AF47485B-311B-45C3-A297-14BD9275D8C2}"/>
               </a:ext>
             </a:extLst>
           </p:cNvPr>
@@ -14207,7 +13601,7 @@
           <p:cNvPr id="21" name="p6b3a">
             <a:extLst xmlns:a="http://schemas.openxmlformats.org/drawingml/2006/main">
               <a:ext uri="{FF2B5EF4-FFF2-40B4-BE49-F238E27FC236}">
-                <a16:creationId xmlns:a16="http://schemas.microsoft.com/office/drawing/2014/main" id="{5C031CB5-5B2E-459A-9A0E-74117D652B08}"/>
+                <a16:creationId xmlns:a16="http://schemas.microsoft.com/office/drawing/2014/main" id="{4DB87AC5-C148-4112-80B2-60DD1A42A168}"/>
               </a:ext>
             </a:extLst>
           </p:cNvPr>
@@ -14268,7 +13662,7 @@
           <p:cNvPr id="22" name="p6b3b">
             <a:extLst xmlns:a="http://schemas.openxmlformats.org/drawingml/2006/main">
               <a:ext uri="{FF2B5EF4-FFF2-40B4-BE49-F238E27FC236}">
-                <a16:creationId xmlns:a16="http://schemas.microsoft.com/office/drawing/2014/main" id="{977DDE63-A853-4E29-95A3-2AE427973931}"/>
+                <a16:creationId xmlns:a16="http://schemas.microsoft.com/office/drawing/2014/main" id="{9AD3D30D-1BEF-4454-A4A5-BE857DD4C8BB}"/>
               </a:ext>
             </a:extLst>
           </p:cNvPr>
@@ -14327,7 +13721,7 @@
           <p:cNvPr id="23" name="p6c">
             <a:extLst xmlns:a="http://schemas.openxmlformats.org/drawingml/2006/main">
               <a:ext uri="{FF2B5EF4-FFF2-40B4-BE49-F238E27FC236}">
-                <a16:creationId xmlns:a16="http://schemas.microsoft.com/office/drawing/2014/main" id="{921E74E4-98D6-42CC-BAE1-9A631ECCDE03}"/>
+                <a16:creationId xmlns:a16="http://schemas.microsoft.com/office/drawing/2014/main" id="{8E7F05BC-3664-4A42-A48F-0A287EA1041E}"/>
               </a:ext>
             </a:extLst>
           </p:cNvPr>
@@ -14483,7 +13877,7 @@
           <p:cNvPr id="6" name="p7a0">
             <a:extLst xmlns:a="http://schemas.openxmlformats.org/drawingml/2006/main">
               <a:ext uri="{FF2B5EF4-FFF2-40B4-BE49-F238E27FC236}">
-                <a16:creationId xmlns:a16="http://schemas.microsoft.com/office/drawing/2014/main" id="{89F65AA1-73BC-4B7B-BEB6-5FD26302D0A5}"/>
+                <a16:creationId xmlns:a16="http://schemas.microsoft.com/office/drawing/2014/main" id="{8A204E0F-0AB7-44F6-B34B-498AB3F4A908}"/>
               </a:ext>
             </a:extLst>
           </p:cNvPr>
@@ -14544,7 +13938,7 @@
           <p:cNvPr id="7" name="p7b0">
             <a:extLst xmlns:a="http://schemas.openxmlformats.org/drawingml/2006/main">
               <a:ext uri="{FF2B5EF4-FFF2-40B4-BE49-F238E27FC236}">
-                <a16:creationId xmlns:a16="http://schemas.microsoft.com/office/drawing/2014/main" id="{5906BE4C-D2F1-45B9-8E32-197893798203}"/>
+                <a16:creationId xmlns:a16="http://schemas.microsoft.com/office/drawing/2014/main" id="{2DDCD5CF-F3E4-410B-B20D-4D2CED65E797}"/>
               </a:ext>
             </a:extLst>
           </p:cNvPr>
@@ -14603,7 +13997,7 @@
           <p:cNvPr id="8" name="p7a1">
             <a:extLst xmlns:a="http://schemas.openxmlformats.org/drawingml/2006/main">
               <a:ext uri="{FF2B5EF4-FFF2-40B4-BE49-F238E27FC236}">
-                <a16:creationId xmlns:a16="http://schemas.microsoft.com/office/drawing/2014/main" id="{AD5C8A02-F7E5-4DA0-B352-12B7FF71875E}"/>
+                <a16:creationId xmlns:a16="http://schemas.microsoft.com/office/drawing/2014/main" id="{F40B0FDC-6A94-44C4-91A0-78B44B0F63BB}"/>
               </a:ext>
             </a:extLst>
           </p:cNvPr>
@@ -14664,7 +14058,7 @@
           <p:cNvPr id="9" name="p7b1">
             <a:extLst xmlns:a="http://schemas.openxmlformats.org/drawingml/2006/main">
               <a:ext uri="{FF2B5EF4-FFF2-40B4-BE49-F238E27FC236}">
-                <a16:creationId xmlns:a16="http://schemas.microsoft.com/office/drawing/2014/main" id="{04F588BC-D742-4B89-A91B-03530F81B140}"/>
+                <a16:creationId xmlns:a16="http://schemas.microsoft.com/office/drawing/2014/main" id="{85F1E0AD-12D1-42DE-97C0-90049B8C9AF4}"/>
               </a:ext>
             </a:extLst>
           </p:cNvPr>
@@ -14723,7 +14117,7 @@
           <p:cNvPr id="10" name="p7a2">
             <a:extLst xmlns:a="http://schemas.openxmlformats.org/drawingml/2006/main">
               <a:ext uri="{FF2B5EF4-FFF2-40B4-BE49-F238E27FC236}">
-                <a16:creationId xmlns:a16="http://schemas.microsoft.com/office/drawing/2014/main" id="{729D317F-9EFE-423A-B369-B8B2E0F791AA}"/>
+                <a16:creationId xmlns:a16="http://schemas.microsoft.com/office/drawing/2014/main" id="{CB418BBB-867D-4D07-B76C-2095FB1A92DC}"/>
               </a:ext>
             </a:extLst>
           </p:cNvPr>
@@ -14784,7 +14178,7 @@
           <p:cNvPr id="11" name="p7b2">
             <a:extLst xmlns:a="http://schemas.openxmlformats.org/drawingml/2006/main">
               <a:ext uri="{FF2B5EF4-FFF2-40B4-BE49-F238E27FC236}">
-                <a16:creationId xmlns:a16="http://schemas.microsoft.com/office/drawing/2014/main" id="{325ECB31-E156-4457-8325-A237552B03C3}"/>
+                <a16:creationId xmlns:a16="http://schemas.microsoft.com/office/drawing/2014/main" id="{D590377B-208B-4C80-B8ED-A6CC736EE5DD}"/>
               </a:ext>
             </a:extLst>
           </p:cNvPr>
@@ -14843,7 +14237,7 @@
           <p:cNvPr id="12" name="p7a3">
             <a:extLst xmlns:a="http://schemas.openxmlformats.org/drawingml/2006/main">
               <a:ext uri="{FF2B5EF4-FFF2-40B4-BE49-F238E27FC236}">
-                <a16:creationId xmlns:a16="http://schemas.microsoft.com/office/drawing/2014/main" id="{4B967697-6321-4655-839F-6EC3BD5CB0AA}"/>
+                <a16:creationId xmlns:a16="http://schemas.microsoft.com/office/drawing/2014/main" id="{F48A82B5-3A43-40E9-8E29-8F157D3D5FCB}"/>
               </a:ext>
             </a:extLst>
           </p:cNvPr>
@@ -14904,7 +14298,7 @@
           <p:cNvPr id="13" name="p7b3">
             <a:extLst xmlns:a="http://schemas.openxmlformats.org/drawingml/2006/main">
               <a:ext uri="{FF2B5EF4-FFF2-40B4-BE49-F238E27FC236}">
-                <a16:creationId xmlns:a16="http://schemas.microsoft.com/office/drawing/2014/main" id="{DFB9C150-C951-4827-B69F-AEDD68E464DC}"/>
+                <a16:creationId xmlns:a16="http://schemas.microsoft.com/office/drawing/2014/main" id="{F07EAD36-8D0E-419A-A2EF-B11B6AFDF868}"/>
               </a:ext>
             </a:extLst>
           </p:cNvPr>
@@ -14963,7 +14357,7 @@
           <p:cNvPr id="14" name="p7arr">
             <a:extLst xmlns:a="http://schemas.openxmlformats.org/drawingml/2006/main">
               <a:ext uri="{FF2B5EF4-FFF2-40B4-BE49-F238E27FC236}">
-                <a16:creationId xmlns:a16="http://schemas.microsoft.com/office/drawing/2014/main" id="{CF10CF56-29CC-43AA-90E7-80C27ED0C198}"/>
+                <a16:creationId xmlns:a16="http://schemas.microsoft.com/office/drawing/2014/main" id="{5AA0F92A-D3EC-4178-9D2F-71556DA1BF50}"/>
               </a:ext>
             </a:extLst>
           </p:cNvPr>
@@ -15020,7 +14414,7 @@
           <p:cNvPr id="15" name="p7fields">
             <a:extLst xmlns:a="http://schemas.openxmlformats.org/drawingml/2006/main">
               <a:ext uri="{FF2B5EF4-FFF2-40B4-BE49-F238E27FC236}">
-                <a16:creationId xmlns:a16="http://schemas.microsoft.com/office/drawing/2014/main" id="{4A4E3D2C-E894-4F41-B024-CC5783DDC4ED}"/>
+                <a16:creationId xmlns:a16="http://schemas.microsoft.com/office/drawing/2014/main" id="{CD0332DC-47C9-4418-88B9-B49C90267971}"/>
               </a:ext>
             </a:extLst>
           </p:cNvPr>
@@ -15127,7 +14521,7 @@
           <p:cNvPr id="16" name="p7p0">
             <a:extLst xmlns:a="http://schemas.openxmlformats.org/drawingml/2006/main">
               <a:ext uri="{FF2B5EF4-FFF2-40B4-BE49-F238E27FC236}">
-                <a16:creationId xmlns:a16="http://schemas.microsoft.com/office/drawing/2014/main" id="{277BD009-7AB9-4E44-9414-C2FB56630A23}"/>
+                <a16:creationId xmlns:a16="http://schemas.microsoft.com/office/drawing/2014/main" id="{23FF8369-B497-4BD2-8F50-AFBAEB370A90}"/>
               </a:ext>
             </a:extLst>
           </p:cNvPr>
@@ -15188,7 +14582,7 @@
           <p:cNvPr id="17" name="p7d0">
             <a:extLst xmlns:a="http://schemas.openxmlformats.org/drawingml/2006/main">
               <a:ext uri="{FF2B5EF4-FFF2-40B4-BE49-F238E27FC236}">
-                <a16:creationId xmlns:a16="http://schemas.microsoft.com/office/drawing/2014/main" id="{AFADBE35-F76E-4A03-A2E0-539E2444D7CE}"/>
+                <a16:creationId xmlns:a16="http://schemas.microsoft.com/office/drawing/2014/main" id="{1E8706B9-8683-4A1A-A65F-59B3AE1DD459}"/>
               </a:ext>
             </a:extLst>
           </p:cNvPr>
@@ -15247,7 +14641,7 @@
           <p:cNvPr id="18" name="p7p1">
             <a:extLst xmlns:a="http://schemas.openxmlformats.org/drawingml/2006/main">
               <a:ext uri="{FF2B5EF4-FFF2-40B4-BE49-F238E27FC236}">
-                <a16:creationId xmlns:a16="http://schemas.microsoft.com/office/drawing/2014/main" id="{1A85B42B-0B18-476E-BE89-A993D6E05451}"/>
+                <a16:creationId xmlns:a16="http://schemas.microsoft.com/office/drawing/2014/main" id="{00EB0067-3250-4738-93EF-B8DF7C409270}"/>
               </a:ext>
             </a:extLst>
           </p:cNvPr>
@@ -15308,7 +14702,7 @@
           <p:cNvPr id="19" name="p7d1">
             <a:extLst xmlns:a="http://schemas.openxmlformats.org/drawingml/2006/main">
               <a:ext uri="{FF2B5EF4-FFF2-40B4-BE49-F238E27FC236}">
-                <a16:creationId xmlns:a16="http://schemas.microsoft.com/office/drawing/2014/main" id="{782A1773-E15A-44E2-A844-3B9F7BECAD30}"/>
+                <a16:creationId xmlns:a16="http://schemas.microsoft.com/office/drawing/2014/main" id="{87C002E6-9E2C-406F-921F-EFB9C8F7C4D4}"/>
               </a:ext>
             </a:extLst>
           </p:cNvPr>
@@ -15367,7 +14761,7 @@
           <p:cNvPr id="20" name="p7p2">
             <a:extLst xmlns:a="http://schemas.openxmlformats.org/drawingml/2006/main">
               <a:ext uri="{FF2B5EF4-FFF2-40B4-BE49-F238E27FC236}">
-                <a16:creationId xmlns:a16="http://schemas.microsoft.com/office/drawing/2014/main" id="{26CA4964-7279-4568-A0EF-FF0674ECD41F}"/>
+                <a16:creationId xmlns:a16="http://schemas.microsoft.com/office/drawing/2014/main" id="{64F894AE-8D75-414E-BAD1-DF61D9D0FD12}"/>
               </a:ext>
             </a:extLst>
           </p:cNvPr>
@@ -15428,7 +14822,7 @@
           <p:cNvPr id="21" name="p7d2">
             <a:extLst xmlns:a="http://schemas.openxmlformats.org/drawingml/2006/main">
               <a:ext uri="{FF2B5EF4-FFF2-40B4-BE49-F238E27FC236}">
-                <a16:creationId xmlns:a16="http://schemas.microsoft.com/office/drawing/2014/main" id="{ACED965C-F1E4-4780-9B55-75717CD9099E}"/>
+                <a16:creationId xmlns:a16="http://schemas.microsoft.com/office/drawing/2014/main" id="{58F007C3-BCAA-49B6-AE5B-151A89F72C68}"/>
               </a:ext>
             </a:extLst>
           </p:cNvPr>
@@ -15584,7 +14978,7 @@
           <p:cNvPr id="6" name="p8ai">
             <a:extLst xmlns:a="http://schemas.openxmlformats.org/drawingml/2006/main">
               <a:ext uri="{FF2B5EF4-FFF2-40B4-BE49-F238E27FC236}">
-                <a16:creationId xmlns:a16="http://schemas.microsoft.com/office/drawing/2014/main" id="{FE1D030E-F55F-42B0-B773-824C2FC99BF5}"/>
+                <a16:creationId xmlns:a16="http://schemas.microsoft.com/office/drawing/2014/main" id="{A2956710-BA5C-4F9A-99D4-440CA39346C5}"/>
               </a:ext>
             </a:extLst>
           </p:cNvPr>
@@ -15669,7 +15063,7 @@
           <p:cNvPr id="7" name="p8a">
             <a:extLst xmlns:a="http://schemas.openxmlformats.org/drawingml/2006/main">
               <a:ext uri="{FF2B5EF4-FFF2-40B4-BE49-F238E27FC236}">
-                <a16:creationId xmlns:a16="http://schemas.microsoft.com/office/drawing/2014/main" id="{F896ADBF-BC5D-4FE8-B6C7-FEBB41B55DB1}"/>
+                <a16:creationId xmlns:a16="http://schemas.microsoft.com/office/drawing/2014/main" id="{8DF637F1-9E8B-460E-B3BD-3DA2BDE497C8}"/>
               </a:ext>
             </a:extLst>
           </p:cNvPr>
@@ -15726,7 +15120,7 @@
           <p:cNvPr id="8" name="p8human">
             <a:extLst xmlns:a="http://schemas.openxmlformats.org/drawingml/2006/main">
               <a:ext uri="{FF2B5EF4-FFF2-40B4-BE49-F238E27FC236}">
-                <a16:creationId xmlns:a16="http://schemas.microsoft.com/office/drawing/2014/main" id="{9F1B3BC2-217A-4F1A-8253-7DEADCD05981}"/>
+                <a16:creationId xmlns:a16="http://schemas.microsoft.com/office/drawing/2014/main" id="{242D3C18-A5B9-42BA-8300-A147F43EAADD}"/>
               </a:ext>
             </a:extLst>
           </p:cNvPr>
@@ -15811,7 +15205,7 @@
           <p:cNvPr id="9" name="p8b">
             <a:extLst xmlns:a="http://schemas.openxmlformats.org/drawingml/2006/main">
               <a:ext uri="{FF2B5EF4-FFF2-40B4-BE49-F238E27FC236}">
-                <a16:creationId xmlns:a16="http://schemas.microsoft.com/office/drawing/2014/main" id="{B83B399C-26FC-4D95-A1AF-5A99347DBDCA}"/>
+                <a16:creationId xmlns:a16="http://schemas.microsoft.com/office/drawing/2014/main" id="{F7298AD2-D7B4-48C8-BB96-B9456C348A7C}"/>
               </a:ext>
             </a:extLst>
           </p:cNvPr>
@@ -15868,7 +15262,7 @@
           <p:cNvPr id="10" name="p8out">
             <a:extLst xmlns:a="http://schemas.openxmlformats.org/drawingml/2006/main">
               <a:ext uri="{FF2B5EF4-FFF2-40B4-BE49-F238E27FC236}">
-                <a16:creationId xmlns:a16="http://schemas.microsoft.com/office/drawing/2014/main" id="{5AEE64C1-9BC0-4916-95D8-22206BF55087}"/>
+                <a16:creationId xmlns:a16="http://schemas.microsoft.com/office/drawing/2014/main" id="{D7D3C0AB-DDD5-4820-A81F-42CCFA348F2D}"/>
               </a:ext>
             </a:extLst>
           </p:cNvPr>
@@ -15953,7 +15347,7 @@
           <p:cNvPr id="11" name="p8no">
             <a:extLst xmlns:a="http://schemas.openxmlformats.org/drawingml/2006/main">
               <a:ext uri="{FF2B5EF4-FFF2-40B4-BE49-F238E27FC236}">
-                <a16:creationId xmlns:a16="http://schemas.microsoft.com/office/drawing/2014/main" id="{2270FE48-9193-450A-8A3F-720CFA61F89F}"/>
+                <a16:creationId xmlns:a16="http://schemas.microsoft.com/office/drawing/2014/main" id="{632769FB-23AD-4851-9F81-CAF628FC5A02}"/>
               </a:ext>
             </a:extLst>
           </p:cNvPr>
@@ -16012,7 +15406,7 @@
           <p:cNvPr id="12" name="p8c">
             <a:extLst xmlns:a="http://schemas.openxmlformats.org/drawingml/2006/main">
               <a:ext uri="{FF2B5EF4-FFF2-40B4-BE49-F238E27FC236}">
-                <a16:creationId xmlns:a16="http://schemas.microsoft.com/office/drawing/2014/main" id="{666C98A3-C9BF-47F6-8F12-1858FE681680}"/>
+                <a16:creationId xmlns:a16="http://schemas.microsoft.com/office/drawing/2014/main" id="{F4EBB2BA-F2F0-459E-8313-57EB06C50C68}"/>
               </a:ext>
             </a:extLst>
           </p:cNvPr>
@@ -16168,34 +15562,36 @@
           <p:cNvPr id="6" name="lab">
             <a:extLst xmlns:a="http://schemas.openxmlformats.org/drawingml/2006/main">
               <a:ext uri="{FF2B5EF4-FFF2-40B4-BE49-F238E27FC236}">
-                <a16:creationId xmlns:a16="http://schemas.microsoft.com/office/drawing/2014/main" id="{A54336B7-8D1A-4603-A6EB-76F28CFB9DDF}"/>
-              </a:ext>
-            </a:extLst>
-          </p:cNvPr>
-          <p:cNvSpPr>
-            <a:spLocks xmlns:a="http://schemas.openxmlformats.org/drawingml/2006/main" noGrp="1"/>
-          </p:cNvSpPr>
-          <p:nvPr/>
-        </p:nvSpPr>
-        <p:spPr>
-          <a:xfrm xmlns:a="http://schemas.openxmlformats.org/drawingml/2006/main">
-            <a:off x="7239000" y="838200"/>
-            <a:ext cx="4324350" cy="323850"/>
+                <a16:creationId xmlns:a16="http://schemas.microsoft.com/office/drawing/2014/main" id="{EC0CBB92-6FDD-4F0B-9EFD-CE3394E1BAE2}"/>
+              </a:ext>
+            </a:extLst>
+          </p:cNvPr>
+          <p:cNvSpPr>
+            <a:spLocks xmlns:a="http://schemas.openxmlformats.org/drawingml/2006/main" noGrp="1"/>
+          </p:cNvSpPr>
+          <p:nvPr/>
+        </p:nvSpPr>
+        <p:spPr>
+          <a:xfrm xmlns:a="http://schemas.openxmlformats.org/drawingml/2006/main">
+            <a:off x="6953250" y="781050"/>
+            <a:ext cx="4610100" cy="438150"/>
           </a:xfrm>
           <a:prstGeom xmlns:a="http://schemas.openxmlformats.org/drawingml/2006/main" prst="rect">
             <a:avLst/>
           </a:prstGeom>
-          <a:noFill xmlns:a="http://schemas.openxmlformats.org/drawingml/2006/main"/>
-          <a:ln xmlns:a="http://schemas.openxmlformats.org/drawingml/2006/main" w="0">
-            <a:noFill/>
-            <a:prstDash val="solid"/>
-          </a:ln>
-        </p:spPr>
-        <p:txBody>
-          <a:bodyPr xmlns:a="http://schemas.openxmlformats.org/drawingml/2006/main" lIns="76200" tIns="38100" rIns="76200" bIns="38100" anchor="ctr"/>
-          <a:lstStyle xmlns:a="http://schemas.openxmlformats.org/drawingml/2006/main"/>
-          <a:p xmlns:a="http://schemas.openxmlformats.org/drawingml/2006/main">
-            <a:pPr algn="r">
+          <a:solidFill xmlns:a="http://schemas.openxmlformats.org/drawingml/2006/main">
+            <a:srgbClr val="F8E9EA"/>
+          </a:solidFill>
+          <a:ln xmlns:a="http://schemas.openxmlformats.org/drawingml/2006/main" w="0">
+            <a:noFill/>
+            <a:prstDash val="solid"/>
+          </a:ln>
+        </p:spPr>
+        <p:txBody>
+          <a:bodyPr xmlns:a="http://schemas.openxmlformats.org/drawingml/2006/main" lIns="76200" tIns="38100" rIns="76200" bIns="38100" anchor="ctr"/>
+          <a:lstStyle xmlns:a="http://schemas.openxmlformats.org/drawingml/2006/main"/>
+          <a:p xmlns:a="http://schemas.openxmlformats.org/drawingml/2006/main">
+            <a:pPr algn="ctr">
               <a:lnSpc>
                 <a:spcPct val="110000"/>
               </a:lnSpc>
@@ -16207,7 +15603,7 @@
               </a:defRPr>
             </a:pPr>
             <a:r>
-              <a:rPr sz="1125" b="1">
+              <a:rPr sz="1800" b="1">
                 <a:solidFill>
                   <a:srgbClr val="C8161E"/>
                 </a:solidFill>
@@ -16215,7 +15611,7 @@
                 <a:ea typeface="Microsoft YaHei"/>
                 <a:cs typeface="Microsoft YaHei"/>
               </a:rPr>
-              <a:t>课程虚构案例｜不预设结构化阅读卡真实有效</a:t>
+              <a:t>课程虚构案例｜非真实实验</a:t>
             </a:r>
           </a:p>
         </p:txBody>
@@ -16225,7 +15621,7 @@
           <p:cNvPr id="7" name="p90">
             <a:extLst xmlns:a="http://schemas.openxmlformats.org/drawingml/2006/main">
               <a:ext uri="{FF2B5EF4-FFF2-40B4-BE49-F238E27FC236}">
-                <a16:creationId xmlns:a16="http://schemas.microsoft.com/office/drawing/2014/main" id="{97421A04-B26A-4B0B-AF88-CDCFC2CCA8B5}"/>
+                <a16:creationId xmlns:a16="http://schemas.microsoft.com/office/drawing/2014/main" id="{EFCF53CC-E1BE-44B0-B860-40F35A54DEB6}"/>
               </a:ext>
             </a:extLst>
           </p:cNvPr>
@@ -16310,7 +15706,7 @@
           <p:cNvPr id="8" name="p9a0">
             <a:extLst xmlns:a="http://schemas.openxmlformats.org/drawingml/2006/main">
               <a:ext uri="{FF2B5EF4-FFF2-40B4-BE49-F238E27FC236}">
-                <a16:creationId xmlns:a16="http://schemas.microsoft.com/office/drawing/2014/main" id="{729B5892-66D0-4392-847A-6215FC8840EB}"/>
+                <a16:creationId xmlns:a16="http://schemas.microsoft.com/office/drawing/2014/main" id="{223F798D-CF50-472F-900D-D95D78EEF4D0}"/>
               </a:ext>
             </a:extLst>
           </p:cNvPr>
@@ -16367,7 +15763,7 @@
           <p:cNvPr id="9" name="p91">
             <a:extLst xmlns:a="http://schemas.openxmlformats.org/drawingml/2006/main">
               <a:ext uri="{FF2B5EF4-FFF2-40B4-BE49-F238E27FC236}">
-                <a16:creationId xmlns:a16="http://schemas.microsoft.com/office/drawing/2014/main" id="{4CBF9590-642C-49C2-8D5E-9E889807195E}"/>
+                <a16:creationId xmlns:a16="http://schemas.microsoft.com/office/drawing/2014/main" id="{11FEECA7-695E-4701-B3F7-D6DA4D81E8D8}"/>
               </a:ext>
             </a:extLst>
           </p:cNvPr>
@@ -16452,7 +15848,7 @@
           <p:cNvPr id="10" name="p9a1">
             <a:extLst xmlns:a="http://schemas.openxmlformats.org/drawingml/2006/main">
               <a:ext uri="{FF2B5EF4-FFF2-40B4-BE49-F238E27FC236}">
-                <a16:creationId xmlns:a16="http://schemas.microsoft.com/office/drawing/2014/main" id="{63EBCE04-C936-41D3-B4BD-782A3AEB6ACE}"/>
+                <a16:creationId xmlns:a16="http://schemas.microsoft.com/office/drawing/2014/main" id="{0737A0C2-2285-4C39-ABE6-A101EEEF3D24}"/>
               </a:ext>
             </a:extLst>
           </p:cNvPr>
@@ -16509,7 +15905,7 @@
           <p:cNvPr id="11" name="p92">
             <a:extLst xmlns:a="http://schemas.openxmlformats.org/drawingml/2006/main">
               <a:ext uri="{FF2B5EF4-FFF2-40B4-BE49-F238E27FC236}">
-                <a16:creationId xmlns:a16="http://schemas.microsoft.com/office/drawing/2014/main" id="{730001B3-ADC6-46BB-A44B-CEA4476447EE}"/>
+                <a16:creationId xmlns:a16="http://schemas.microsoft.com/office/drawing/2014/main" id="{A9EF4F26-AE96-4A84-BFA0-D97BC2C0BFE1}"/>
               </a:ext>
             </a:extLst>
           </p:cNvPr>
@@ -16594,7 +15990,7 @@
           <p:cNvPr id="12" name="p9a2">
             <a:extLst xmlns:a="http://schemas.openxmlformats.org/drawingml/2006/main">
               <a:ext uri="{FF2B5EF4-FFF2-40B4-BE49-F238E27FC236}">
-                <a16:creationId xmlns:a16="http://schemas.microsoft.com/office/drawing/2014/main" id="{F0E81083-672F-46C4-A6F7-4AD47A2C4BEB}"/>
+                <a16:creationId xmlns:a16="http://schemas.microsoft.com/office/drawing/2014/main" id="{128030AE-85EF-4C6E-80FE-F90A156C18D8}"/>
               </a:ext>
             </a:extLst>
           </p:cNvPr>
@@ -16651,7 +16047,7 @@
           <p:cNvPr id="13" name="p93">
             <a:extLst xmlns:a="http://schemas.openxmlformats.org/drawingml/2006/main">
               <a:ext uri="{FF2B5EF4-FFF2-40B4-BE49-F238E27FC236}">
-                <a16:creationId xmlns:a16="http://schemas.microsoft.com/office/drawing/2014/main" id="{5CAEC03F-7D8D-4495-868B-1A39C3C1CB8A}"/>
+                <a16:creationId xmlns:a16="http://schemas.microsoft.com/office/drawing/2014/main" id="{082E27F5-10B4-4328-A6B9-E1E2E1A95F86}"/>
               </a:ext>
             </a:extLst>
           </p:cNvPr>
@@ -16736,7 +16132,7 @@
           <p:cNvPr id="14" name="p9trace">
             <a:extLst xmlns:a="http://schemas.openxmlformats.org/drawingml/2006/main">
               <a:ext uri="{FF2B5EF4-FFF2-40B4-BE49-F238E27FC236}">
-                <a16:creationId xmlns:a16="http://schemas.microsoft.com/office/drawing/2014/main" id="{909270D5-30D1-4F0F-BA04-995254883343}"/>
+                <a16:creationId xmlns:a16="http://schemas.microsoft.com/office/drawing/2014/main" id="{CA30731D-2FDD-45DC-8972-367E3AA26767}"/>
               </a:ext>
             </a:extLst>
           </p:cNvPr>
@@ -16795,7 +16191,7 @@
           <p:cNvPr id="15" name="p9c">
             <a:extLst xmlns:a="http://schemas.openxmlformats.org/drawingml/2006/main">
               <a:ext uri="{FF2B5EF4-FFF2-40B4-BE49-F238E27FC236}">
-                <a16:creationId xmlns:a16="http://schemas.microsoft.com/office/drawing/2014/main" id="{4496AE85-C751-42A3-B053-92490DEB9AF0}"/>
+                <a16:creationId xmlns:a16="http://schemas.microsoft.com/office/drawing/2014/main" id="{92EE24C8-53CB-451D-955D-B2A4144D6B27}"/>
               </a:ext>
             </a:extLst>
           </p:cNvPr>
